--- a/public/videos/repositories/chutonavi/chutonavi-tech-preview.pptx
+++ b/public/videos/repositories/chutonavi/chutonavi-tech-preview.pptx
@@ -134,7 +134,7 @@
           <p:cNvPr id="2" name="タイトル 1">
             <a:extLst>
               <a:ext uri="{FF2B5EF4-FFF2-40B4-BE49-F238E27FC236}">
-                <a16:creationId xmlns:a16="http://schemas.microsoft.com/office/drawing/2014/main" id="{5DFD1B54-81D4-D029-821C-71E8D0631A19}"/>
+                <a16:creationId xmlns:a16="http://schemas.microsoft.com/office/drawing/2014/main" id="{00D2098D-9033-748E-19A4-5E0E5A792373}"/>
               </a:ext>
             </a:extLst>
           </p:cNvPr>
@@ -171,7 +171,7 @@
           <p:cNvPr id="3" name="字幕 2">
             <a:extLst>
               <a:ext uri="{FF2B5EF4-FFF2-40B4-BE49-F238E27FC236}">
-                <a16:creationId xmlns:a16="http://schemas.microsoft.com/office/drawing/2014/main" id="{19C12079-D067-CFD3-BADC-F49C7AF38772}"/>
+                <a16:creationId xmlns:a16="http://schemas.microsoft.com/office/drawing/2014/main" id="{6DBF6CFD-BEBC-DEC9-BAA2-547047B587C7}"/>
               </a:ext>
             </a:extLst>
           </p:cNvPr>
@@ -241,7 +241,7 @@
           <p:cNvPr id="4" name="日付プレースホルダー 3">
             <a:extLst>
               <a:ext uri="{FF2B5EF4-FFF2-40B4-BE49-F238E27FC236}">
-                <a16:creationId xmlns:a16="http://schemas.microsoft.com/office/drawing/2014/main" id="{0763CA3E-9F45-A0E2-117B-D08DB590968C}"/>
+                <a16:creationId xmlns:a16="http://schemas.microsoft.com/office/drawing/2014/main" id="{28CD24D6-9C4A-FD54-203A-E647B86D74EF}"/>
               </a:ext>
             </a:extLst>
           </p:cNvPr>
@@ -257,7 +257,7 @@
           <a:bodyPr/>
           <a:lstStyle/>
           <a:p>
-            <a:fld id="{99CEBD03-1F00-4E29-8F45-768CA658975D}" type="datetimeFigureOut">
+            <a:fld id="{5E8F4A22-A18C-402B-B7CA-A3D7DAB0F12F}" type="datetimeFigureOut">
               <a:rPr kumimoji="1" lang="ja-JP" altLang="en-US" smtClean="0"/>
               <a:t>2026/7/30</a:t>
             </a:fld>
@@ -270,7 +270,7 @@
           <p:cNvPr id="5" name="フッター プレースホルダー 4">
             <a:extLst>
               <a:ext uri="{FF2B5EF4-FFF2-40B4-BE49-F238E27FC236}">
-                <a16:creationId xmlns:a16="http://schemas.microsoft.com/office/drawing/2014/main" id="{FB5EF57E-41F3-CD0D-38CC-0B67244ADF78}"/>
+                <a16:creationId xmlns:a16="http://schemas.microsoft.com/office/drawing/2014/main" id="{B49D3DA7-75F1-5215-129E-15CD27366EBB}"/>
               </a:ext>
             </a:extLst>
           </p:cNvPr>
@@ -295,7 +295,7 @@
           <p:cNvPr id="6" name="スライド番号プレースホルダー 5">
             <a:extLst>
               <a:ext uri="{FF2B5EF4-FFF2-40B4-BE49-F238E27FC236}">
-                <a16:creationId xmlns:a16="http://schemas.microsoft.com/office/drawing/2014/main" id="{3B4251B4-F310-34F9-B6E8-F8261CD50E5E}"/>
+                <a16:creationId xmlns:a16="http://schemas.microsoft.com/office/drawing/2014/main" id="{96437476-073A-8286-DE0A-C3CB0CB5042A}"/>
               </a:ext>
             </a:extLst>
           </p:cNvPr>
@@ -311,7 +311,7 @@
           <a:bodyPr/>
           <a:lstStyle/>
           <a:p>
-            <a:fld id="{4E1BC574-09EF-48DF-A299-EF5DC6E00DE3}" type="slidenum">
+            <a:fld id="{4431D062-010A-4A9F-9E50-F30F5795E17A}" type="slidenum">
               <a:rPr kumimoji="1" lang="ja-JP" altLang="en-US" smtClean="0"/>
               <a:t>‹#›</a:t>
             </a:fld>
@@ -322,7 +322,7 @@
     </p:spTree>
     <p:extLst>
       <p:ext uri="{BB962C8B-B14F-4D97-AF65-F5344CB8AC3E}">
-        <p14:creationId xmlns:p14="http://schemas.microsoft.com/office/powerpoint/2010/main" val="575254317"/>
+        <p14:creationId xmlns:p14="http://schemas.microsoft.com/office/powerpoint/2010/main" val="3644371883"/>
       </p:ext>
     </p:extLst>
   </p:cSld>
@@ -354,7 +354,7 @@
           <p:cNvPr id="2" name="タイトル 1">
             <a:extLst>
               <a:ext uri="{FF2B5EF4-FFF2-40B4-BE49-F238E27FC236}">
-                <a16:creationId xmlns:a16="http://schemas.microsoft.com/office/drawing/2014/main" id="{982DF949-F823-3728-A27B-4C68CB3DDDA5}"/>
+                <a16:creationId xmlns:a16="http://schemas.microsoft.com/office/drawing/2014/main" id="{3E970EB6-0369-6BCF-A9DD-428B76E83943}"/>
               </a:ext>
             </a:extLst>
           </p:cNvPr>
@@ -382,7 +382,7 @@
           <p:cNvPr id="3" name="縦書きテキスト プレースホルダー 2">
             <a:extLst>
               <a:ext uri="{FF2B5EF4-FFF2-40B4-BE49-F238E27FC236}">
-                <a16:creationId xmlns:a16="http://schemas.microsoft.com/office/drawing/2014/main" id="{99BBA09E-8E93-D141-162A-A349F9630637}"/>
+                <a16:creationId xmlns:a16="http://schemas.microsoft.com/office/drawing/2014/main" id="{5AF400D0-61B1-1EFB-55C0-4DAB594104FE}"/>
               </a:ext>
             </a:extLst>
           </p:cNvPr>
@@ -471,7 +471,7 @@
           <p:cNvPr id="4" name="日付プレースホルダー 3">
             <a:extLst>
               <a:ext uri="{FF2B5EF4-FFF2-40B4-BE49-F238E27FC236}">
-                <a16:creationId xmlns:a16="http://schemas.microsoft.com/office/drawing/2014/main" id="{F6D9D8E8-063A-E1EB-667C-A903F79160DB}"/>
+                <a16:creationId xmlns:a16="http://schemas.microsoft.com/office/drawing/2014/main" id="{75AAD74E-5AAB-DE35-8AB2-1950EA21A708}"/>
               </a:ext>
             </a:extLst>
           </p:cNvPr>
@@ -487,7 +487,7 @@
           <a:bodyPr/>
           <a:lstStyle/>
           <a:p>
-            <a:fld id="{99CEBD03-1F00-4E29-8F45-768CA658975D}" type="datetimeFigureOut">
+            <a:fld id="{5E8F4A22-A18C-402B-B7CA-A3D7DAB0F12F}" type="datetimeFigureOut">
               <a:rPr kumimoji="1" lang="ja-JP" altLang="en-US" smtClean="0"/>
               <a:t>2026/7/30</a:t>
             </a:fld>
@@ -500,7 +500,7 @@
           <p:cNvPr id="5" name="フッター プレースホルダー 4">
             <a:extLst>
               <a:ext uri="{FF2B5EF4-FFF2-40B4-BE49-F238E27FC236}">
-                <a16:creationId xmlns:a16="http://schemas.microsoft.com/office/drawing/2014/main" id="{381C6467-5785-94B7-1E73-C309E4313A40}"/>
+                <a16:creationId xmlns:a16="http://schemas.microsoft.com/office/drawing/2014/main" id="{C0C8B998-7610-5430-4177-9116F8304CF2}"/>
               </a:ext>
             </a:extLst>
           </p:cNvPr>
@@ -525,7 +525,7 @@
           <p:cNvPr id="6" name="スライド番号プレースホルダー 5">
             <a:extLst>
               <a:ext uri="{FF2B5EF4-FFF2-40B4-BE49-F238E27FC236}">
-                <a16:creationId xmlns:a16="http://schemas.microsoft.com/office/drawing/2014/main" id="{81C55967-EA15-5860-D677-4507A22FFB78}"/>
+                <a16:creationId xmlns:a16="http://schemas.microsoft.com/office/drawing/2014/main" id="{F7D1AD66-0F8E-35EE-3343-5287CD353A81}"/>
               </a:ext>
             </a:extLst>
           </p:cNvPr>
@@ -541,7 +541,7 @@
           <a:bodyPr/>
           <a:lstStyle/>
           <a:p>
-            <a:fld id="{4E1BC574-09EF-48DF-A299-EF5DC6E00DE3}" type="slidenum">
+            <a:fld id="{4431D062-010A-4A9F-9E50-F30F5795E17A}" type="slidenum">
               <a:rPr kumimoji="1" lang="ja-JP" altLang="en-US" smtClean="0"/>
               <a:t>‹#›</a:t>
             </a:fld>
@@ -552,7 +552,7 @@
     </p:spTree>
     <p:extLst>
       <p:ext uri="{BB962C8B-B14F-4D97-AF65-F5344CB8AC3E}">
-        <p14:creationId xmlns:p14="http://schemas.microsoft.com/office/powerpoint/2010/main" val="2329920907"/>
+        <p14:creationId xmlns:p14="http://schemas.microsoft.com/office/powerpoint/2010/main" val="69721661"/>
       </p:ext>
     </p:extLst>
   </p:cSld>
@@ -584,7 +584,7 @@
           <p:cNvPr id="2" name="縦書きタイトル 1">
             <a:extLst>
               <a:ext uri="{FF2B5EF4-FFF2-40B4-BE49-F238E27FC236}">
-                <a16:creationId xmlns:a16="http://schemas.microsoft.com/office/drawing/2014/main" id="{E1171DDB-C8F6-B1A9-B5BB-3B3A6D9BB65B}"/>
+                <a16:creationId xmlns:a16="http://schemas.microsoft.com/office/drawing/2014/main" id="{61D3BC68-CE22-98E9-CF50-E559FB3E53E2}"/>
               </a:ext>
             </a:extLst>
           </p:cNvPr>
@@ -617,7 +617,7 @@
           <p:cNvPr id="3" name="縦書きテキスト プレースホルダー 2">
             <a:extLst>
               <a:ext uri="{FF2B5EF4-FFF2-40B4-BE49-F238E27FC236}">
-                <a16:creationId xmlns:a16="http://schemas.microsoft.com/office/drawing/2014/main" id="{8BDBCAF1-6F9F-F7A7-8774-649151F39208}"/>
+                <a16:creationId xmlns:a16="http://schemas.microsoft.com/office/drawing/2014/main" id="{E3ACED0F-1AB0-F19B-9A77-5E272A44584B}"/>
               </a:ext>
             </a:extLst>
           </p:cNvPr>
@@ -711,7 +711,7 @@
           <p:cNvPr id="4" name="日付プレースホルダー 3">
             <a:extLst>
               <a:ext uri="{FF2B5EF4-FFF2-40B4-BE49-F238E27FC236}">
-                <a16:creationId xmlns:a16="http://schemas.microsoft.com/office/drawing/2014/main" id="{4884ECB2-196A-6BF4-B799-AF4646613326}"/>
+                <a16:creationId xmlns:a16="http://schemas.microsoft.com/office/drawing/2014/main" id="{91D3B356-189D-D826-529C-0A144BA9C0EC}"/>
               </a:ext>
             </a:extLst>
           </p:cNvPr>
@@ -727,7 +727,7 @@
           <a:bodyPr/>
           <a:lstStyle/>
           <a:p>
-            <a:fld id="{99CEBD03-1F00-4E29-8F45-768CA658975D}" type="datetimeFigureOut">
+            <a:fld id="{5E8F4A22-A18C-402B-B7CA-A3D7DAB0F12F}" type="datetimeFigureOut">
               <a:rPr kumimoji="1" lang="ja-JP" altLang="en-US" smtClean="0"/>
               <a:t>2026/7/30</a:t>
             </a:fld>
@@ -740,7 +740,7 @@
           <p:cNvPr id="5" name="フッター プレースホルダー 4">
             <a:extLst>
               <a:ext uri="{FF2B5EF4-FFF2-40B4-BE49-F238E27FC236}">
-                <a16:creationId xmlns:a16="http://schemas.microsoft.com/office/drawing/2014/main" id="{0CD13940-883E-BA3C-53F1-DC4C310AA622}"/>
+                <a16:creationId xmlns:a16="http://schemas.microsoft.com/office/drawing/2014/main" id="{DF89743F-75D1-1377-19D3-A91368A38360}"/>
               </a:ext>
             </a:extLst>
           </p:cNvPr>
@@ -765,7 +765,7 @@
           <p:cNvPr id="6" name="スライド番号プレースホルダー 5">
             <a:extLst>
               <a:ext uri="{FF2B5EF4-FFF2-40B4-BE49-F238E27FC236}">
-                <a16:creationId xmlns:a16="http://schemas.microsoft.com/office/drawing/2014/main" id="{2CCF4587-471D-032D-1B0C-7C505F7C09B4}"/>
+                <a16:creationId xmlns:a16="http://schemas.microsoft.com/office/drawing/2014/main" id="{C3591822-036E-6616-6F5C-DB8A874331C6}"/>
               </a:ext>
             </a:extLst>
           </p:cNvPr>
@@ -781,7 +781,7 @@
           <a:bodyPr/>
           <a:lstStyle/>
           <a:p>
-            <a:fld id="{4E1BC574-09EF-48DF-A299-EF5DC6E00DE3}" type="slidenum">
+            <a:fld id="{4431D062-010A-4A9F-9E50-F30F5795E17A}" type="slidenum">
               <a:rPr kumimoji="1" lang="ja-JP" altLang="en-US" smtClean="0"/>
               <a:t>‹#›</a:t>
             </a:fld>
@@ -792,7 +792,7 @@
     </p:spTree>
     <p:extLst>
       <p:ext uri="{BB962C8B-B14F-4D97-AF65-F5344CB8AC3E}">
-        <p14:creationId xmlns:p14="http://schemas.microsoft.com/office/powerpoint/2010/main" val="2476161695"/>
+        <p14:creationId xmlns:p14="http://schemas.microsoft.com/office/powerpoint/2010/main" val="3651262716"/>
       </p:ext>
     </p:extLst>
   </p:cSld>
@@ -824,7 +824,7 @@
           <p:cNvPr id="2" name="タイトル 1">
             <a:extLst>
               <a:ext uri="{FF2B5EF4-FFF2-40B4-BE49-F238E27FC236}">
-                <a16:creationId xmlns:a16="http://schemas.microsoft.com/office/drawing/2014/main" id="{C2FFED14-E99B-9D0F-4D22-48B57D9A8AE0}"/>
+                <a16:creationId xmlns:a16="http://schemas.microsoft.com/office/drawing/2014/main" id="{3F852353-F662-32EB-1AC7-76DC8A8AC10E}"/>
               </a:ext>
             </a:extLst>
           </p:cNvPr>
@@ -852,7 +852,7 @@
           <p:cNvPr id="3" name="コンテンツ プレースホルダー 2">
             <a:extLst>
               <a:ext uri="{FF2B5EF4-FFF2-40B4-BE49-F238E27FC236}">
-                <a16:creationId xmlns:a16="http://schemas.microsoft.com/office/drawing/2014/main" id="{FB652681-EF20-2B93-246E-787319B5EEE7}"/>
+                <a16:creationId xmlns:a16="http://schemas.microsoft.com/office/drawing/2014/main" id="{3DBACD27-402C-ABC4-496F-4A7E02865575}"/>
               </a:ext>
             </a:extLst>
           </p:cNvPr>
@@ -941,7 +941,7 @@
           <p:cNvPr id="4" name="日付プレースホルダー 3">
             <a:extLst>
               <a:ext uri="{FF2B5EF4-FFF2-40B4-BE49-F238E27FC236}">
-                <a16:creationId xmlns:a16="http://schemas.microsoft.com/office/drawing/2014/main" id="{4F282EB4-05E1-B4FC-9B18-92A4C5BA659F}"/>
+                <a16:creationId xmlns:a16="http://schemas.microsoft.com/office/drawing/2014/main" id="{174E5E93-B070-5D5D-1948-E0A6F552BCF3}"/>
               </a:ext>
             </a:extLst>
           </p:cNvPr>
@@ -957,7 +957,7 @@
           <a:bodyPr/>
           <a:lstStyle/>
           <a:p>
-            <a:fld id="{99CEBD03-1F00-4E29-8F45-768CA658975D}" type="datetimeFigureOut">
+            <a:fld id="{5E8F4A22-A18C-402B-B7CA-A3D7DAB0F12F}" type="datetimeFigureOut">
               <a:rPr kumimoji="1" lang="ja-JP" altLang="en-US" smtClean="0"/>
               <a:t>2026/7/30</a:t>
             </a:fld>
@@ -970,7 +970,7 @@
           <p:cNvPr id="5" name="フッター プレースホルダー 4">
             <a:extLst>
               <a:ext uri="{FF2B5EF4-FFF2-40B4-BE49-F238E27FC236}">
-                <a16:creationId xmlns:a16="http://schemas.microsoft.com/office/drawing/2014/main" id="{1E0B6DD3-5450-BF5F-A145-FD9F4E35B98A}"/>
+                <a16:creationId xmlns:a16="http://schemas.microsoft.com/office/drawing/2014/main" id="{68D9E9B4-65ED-EC76-DFD8-9AC57042170E}"/>
               </a:ext>
             </a:extLst>
           </p:cNvPr>
@@ -995,7 +995,7 @@
           <p:cNvPr id="6" name="スライド番号プレースホルダー 5">
             <a:extLst>
               <a:ext uri="{FF2B5EF4-FFF2-40B4-BE49-F238E27FC236}">
-                <a16:creationId xmlns:a16="http://schemas.microsoft.com/office/drawing/2014/main" id="{8FF489B6-F835-116D-DE97-EB61D477B232}"/>
+                <a16:creationId xmlns:a16="http://schemas.microsoft.com/office/drawing/2014/main" id="{C864C769-DE32-95F8-105B-10133EA81A99}"/>
               </a:ext>
             </a:extLst>
           </p:cNvPr>
@@ -1011,7 +1011,7 @@
           <a:bodyPr/>
           <a:lstStyle/>
           <a:p>
-            <a:fld id="{4E1BC574-09EF-48DF-A299-EF5DC6E00DE3}" type="slidenum">
+            <a:fld id="{4431D062-010A-4A9F-9E50-F30F5795E17A}" type="slidenum">
               <a:rPr kumimoji="1" lang="ja-JP" altLang="en-US" smtClean="0"/>
               <a:t>‹#›</a:t>
             </a:fld>
@@ -1022,7 +1022,7 @@
     </p:spTree>
     <p:extLst>
       <p:ext uri="{BB962C8B-B14F-4D97-AF65-F5344CB8AC3E}">
-        <p14:creationId xmlns:p14="http://schemas.microsoft.com/office/powerpoint/2010/main" val="3790773583"/>
+        <p14:creationId xmlns:p14="http://schemas.microsoft.com/office/powerpoint/2010/main" val="1366829875"/>
       </p:ext>
     </p:extLst>
   </p:cSld>
@@ -1054,7 +1054,7 @@
           <p:cNvPr id="2" name="タイトル 1">
             <a:extLst>
               <a:ext uri="{FF2B5EF4-FFF2-40B4-BE49-F238E27FC236}">
-                <a16:creationId xmlns:a16="http://schemas.microsoft.com/office/drawing/2014/main" id="{27CB1454-24BF-181E-96FD-6AD203C507A6}"/>
+                <a16:creationId xmlns:a16="http://schemas.microsoft.com/office/drawing/2014/main" id="{8217B8A3-CAC0-3EA5-4F69-615CE1B0EDB2}"/>
               </a:ext>
             </a:extLst>
           </p:cNvPr>
@@ -1091,7 +1091,7 @@
           <p:cNvPr id="3" name="テキスト プレースホルダー 2">
             <a:extLst>
               <a:ext uri="{FF2B5EF4-FFF2-40B4-BE49-F238E27FC236}">
-                <a16:creationId xmlns:a16="http://schemas.microsoft.com/office/drawing/2014/main" id="{C5AA3EA7-AB7A-16D6-F801-E5BF40218CE3}"/>
+                <a16:creationId xmlns:a16="http://schemas.microsoft.com/office/drawing/2014/main" id="{2BE27F43-76A2-3CBF-BD77-F7733875B3DD}"/>
               </a:ext>
             </a:extLst>
           </p:cNvPr>
@@ -1216,7 +1216,7 @@
           <p:cNvPr id="4" name="日付プレースホルダー 3">
             <a:extLst>
               <a:ext uri="{FF2B5EF4-FFF2-40B4-BE49-F238E27FC236}">
-                <a16:creationId xmlns:a16="http://schemas.microsoft.com/office/drawing/2014/main" id="{3139C412-DC7D-FD7B-101F-6F0D8778276F}"/>
+                <a16:creationId xmlns:a16="http://schemas.microsoft.com/office/drawing/2014/main" id="{D4FCA0BA-50FA-40BD-ED16-9B0DB2A6130B}"/>
               </a:ext>
             </a:extLst>
           </p:cNvPr>
@@ -1232,7 +1232,7 @@
           <a:bodyPr/>
           <a:lstStyle/>
           <a:p>
-            <a:fld id="{99CEBD03-1F00-4E29-8F45-768CA658975D}" type="datetimeFigureOut">
+            <a:fld id="{5E8F4A22-A18C-402B-B7CA-A3D7DAB0F12F}" type="datetimeFigureOut">
               <a:rPr kumimoji="1" lang="ja-JP" altLang="en-US" smtClean="0"/>
               <a:t>2026/7/30</a:t>
             </a:fld>
@@ -1245,7 +1245,7 @@
           <p:cNvPr id="5" name="フッター プレースホルダー 4">
             <a:extLst>
               <a:ext uri="{FF2B5EF4-FFF2-40B4-BE49-F238E27FC236}">
-                <a16:creationId xmlns:a16="http://schemas.microsoft.com/office/drawing/2014/main" id="{1A4118BD-3A37-4683-869B-D78C06F4875E}"/>
+                <a16:creationId xmlns:a16="http://schemas.microsoft.com/office/drawing/2014/main" id="{34C789EC-C6EA-60CD-5426-3D29C9279550}"/>
               </a:ext>
             </a:extLst>
           </p:cNvPr>
@@ -1270,7 +1270,7 @@
           <p:cNvPr id="6" name="スライド番号プレースホルダー 5">
             <a:extLst>
               <a:ext uri="{FF2B5EF4-FFF2-40B4-BE49-F238E27FC236}">
-                <a16:creationId xmlns:a16="http://schemas.microsoft.com/office/drawing/2014/main" id="{E9E43AC9-3B09-2A37-8D7C-E213E6442E18}"/>
+                <a16:creationId xmlns:a16="http://schemas.microsoft.com/office/drawing/2014/main" id="{1DE99A7A-3AE2-231A-3B21-11059B2DE4AE}"/>
               </a:ext>
             </a:extLst>
           </p:cNvPr>
@@ -1286,7 +1286,7 @@
           <a:bodyPr/>
           <a:lstStyle/>
           <a:p>
-            <a:fld id="{4E1BC574-09EF-48DF-A299-EF5DC6E00DE3}" type="slidenum">
+            <a:fld id="{4431D062-010A-4A9F-9E50-F30F5795E17A}" type="slidenum">
               <a:rPr kumimoji="1" lang="ja-JP" altLang="en-US" smtClean="0"/>
               <a:t>‹#›</a:t>
             </a:fld>
@@ -1297,7 +1297,7 @@
     </p:spTree>
     <p:extLst>
       <p:ext uri="{BB962C8B-B14F-4D97-AF65-F5344CB8AC3E}">
-        <p14:creationId xmlns:p14="http://schemas.microsoft.com/office/powerpoint/2010/main" val="120989858"/>
+        <p14:creationId xmlns:p14="http://schemas.microsoft.com/office/powerpoint/2010/main" val="658372180"/>
       </p:ext>
     </p:extLst>
   </p:cSld>
@@ -1329,7 +1329,7 @@
           <p:cNvPr id="2" name="タイトル 1">
             <a:extLst>
               <a:ext uri="{FF2B5EF4-FFF2-40B4-BE49-F238E27FC236}">
-                <a16:creationId xmlns:a16="http://schemas.microsoft.com/office/drawing/2014/main" id="{7563BA1C-862B-3C7A-F16C-2AB24C38F2B7}"/>
+                <a16:creationId xmlns:a16="http://schemas.microsoft.com/office/drawing/2014/main" id="{7A4221FA-B9F8-FB2A-7273-76B79D9FB838}"/>
               </a:ext>
             </a:extLst>
           </p:cNvPr>
@@ -1357,7 +1357,7 @@
           <p:cNvPr id="3" name="コンテンツ プレースホルダー 2">
             <a:extLst>
               <a:ext uri="{FF2B5EF4-FFF2-40B4-BE49-F238E27FC236}">
-                <a16:creationId xmlns:a16="http://schemas.microsoft.com/office/drawing/2014/main" id="{A237C9E6-7D01-B187-4DB7-3740A561714F}"/>
+                <a16:creationId xmlns:a16="http://schemas.microsoft.com/office/drawing/2014/main" id="{9C4CC890-5440-0633-33C1-69ABF8FEE557}"/>
               </a:ext>
             </a:extLst>
           </p:cNvPr>
@@ -1451,7 +1451,7 @@
           <p:cNvPr id="4" name="コンテンツ プレースホルダー 3">
             <a:extLst>
               <a:ext uri="{FF2B5EF4-FFF2-40B4-BE49-F238E27FC236}">
-                <a16:creationId xmlns:a16="http://schemas.microsoft.com/office/drawing/2014/main" id="{7EEEE4FA-E9C7-3902-C74A-94C4406C06BB}"/>
+                <a16:creationId xmlns:a16="http://schemas.microsoft.com/office/drawing/2014/main" id="{2DF9A25C-2DE0-D20A-E9D6-54F5495DCBE4}"/>
               </a:ext>
             </a:extLst>
           </p:cNvPr>
@@ -1545,7 +1545,7 @@
           <p:cNvPr id="5" name="日付プレースホルダー 4">
             <a:extLst>
               <a:ext uri="{FF2B5EF4-FFF2-40B4-BE49-F238E27FC236}">
-                <a16:creationId xmlns:a16="http://schemas.microsoft.com/office/drawing/2014/main" id="{0D762789-D053-D9D8-2AF5-6842BCB896C2}"/>
+                <a16:creationId xmlns:a16="http://schemas.microsoft.com/office/drawing/2014/main" id="{CC865B42-152B-1CF0-41F3-5DFCAFE3333C}"/>
               </a:ext>
             </a:extLst>
           </p:cNvPr>
@@ -1561,7 +1561,7 @@
           <a:bodyPr/>
           <a:lstStyle/>
           <a:p>
-            <a:fld id="{99CEBD03-1F00-4E29-8F45-768CA658975D}" type="datetimeFigureOut">
+            <a:fld id="{5E8F4A22-A18C-402B-B7CA-A3D7DAB0F12F}" type="datetimeFigureOut">
               <a:rPr kumimoji="1" lang="ja-JP" altLang="en-US" smtClean="0"/>
               <a:t>2026/7/30</a:t>
             </a:fld>
@@ -1574,7 +1574,7 @@
           <p:cNvPr id="6" name="フッター プレースホルダー 5">
             <a:extLst>
               <a:ext uri="{FF2B5EF4-FFF2-40B4-BE49-F238E27FC236}">
-                <a16:creationId xmlns:a16="http://schemas.microsoft.com/office/drawing/2014/main" id="{8623CAA8-2CEF-EB0B-2B72-6C1C4452D0F7}"/>
+                <a16:creationId xmlns:a16="http://schemas.microsoft.com/office/drawing/2014/main" id="{05C30695-7F15-A909-988B-9EFACC1C5856}"/>
               </a:ext>
             </a:extLst>
           </p:cNvPr>
@@ -1599,7 +1599,7 @@
           <p:cNvPr id="7" name="スライド番号プレースホルダー 6">
             <a:extLst>
               <a:ext uri="{FF2B5EF4-FFF2-40B4-BE49-F238E27FC236}">
-                <a16:creationId xmlns:a16="http://schemas.microsoft.com/office/drawing/2014/main" id="{4CC6D30B-5FC1-7A0C-A1B9-B5A52452A095}"/>
+                <a16:creationId xmlns:a16="http://schemas.microsoft.com/office/drawing/2014/main" id="{CA096A3C-9474-CB9C-9740-162AAFA4FB11}"/>
               </a:ext>
             </a:extLst>
           </p:cNvPr>
@@ -1615,7 +1615,7 @@
           <a:bodyPr/>
           <a:lstStyle/>
           <a:p>
-            <a:fld id="{4E1BC574-09EF-48DF-A299-EF5DC6E00DE3}" type="slidenum">
+            <a:fld id="{4431D062-010A-4A9F-9E50-F30F5795E17A}" type="slidenum">
               <a:rPr kumimoji="1" lang="ja-JP" altLang="en-US" smtClean="0"/>
               <a:t>‹#›</a:t>
             </a:fld>
@@ -1626,7 +1626,7 @@
     </p:spTree>
     <p:extLst>
       <p:ext uri="{BB962C8B-B14F-4D97-AF65-F5344CB8AC3E}">
-        <p14:creationId xmlns:p14="http://schemas.microsoft.com/office/powerpoint/2010/main" val="2381487620"/>
+        <p14:creationId xmlns:p14="http://schemas.microsoft.com/office/powerpoint/2010/main" val="1792576176"/>
       </p:ext>
     </p:extLst>
   </p:cSld>
@@ -1658,7 +1658,7 @@
           <p:cNvPr id="2" name="タイトル 1">
             <a:extLst>
               <a:ext uri="{FF2B5EF4-FFF2-40B4-BE49-F238E27FC236}">
-                <a16:creationId xmlns:a16="http://schemas.microsoft.com/office/drawing/2014/main" id="{14E00EC7-B249-EF0C-C0E4-DE9CA323B4B6}"/>
+                <a16:creationId xmlns:a16="http://schemas.microsoft.com/office/drawing/2014/main" id="{2B30D61B-84D1-50FC-799D-11C1C366AC84}"/>
               </a:ext>
             </a:extLst>
           </p:cNvPr>
@@ -1691,7 +1691,7 @@
           <p:cNvPr id="3" name="テキスト プレースホルダー 2">
             <a:extLst>
               <a:ext uri="{FF2B5EF4-FFF2-40B4-BE49-F238E27FC236}">
-                <a16:creationId xmlns:a16="http://schemas.microsoft.com/office/drawing/2014/main" id="{8A89D7D5-1E1A-2FFD-C0E4-AF1B889B73F7}"/>
+                <a16:creationId xmlns:a16="http://schemas.microsoft.com/office/drawing/2014/main" id="{809DDA02-A494-9067-9695-008684E9FFF4}"/>
               </a:ext>
             </a:extLst>
           </p:cNvPr>
@@ -1762,7 +1762,7 @@
           <p:cNvPr id="4" name="コンテンツ プレースホルダー 3">
             <a:extLst>
               <a:ext uri="{FF2B5EF4-FFF2-40B4-BE49-F238E27FC236}">
-                <a16:creationId xmlns:a16="http://schemas.microsoft.com/office/drawing/2014/main" id="{3F110BB6-CC68-242E-7825-0FB3253BAB73}"/>
+                <a16:creationId xmlns:a16="http://schemas.microsoft.com/office/drawing/2014/main" id="{12BBB53E-041C-AC22-AC33-361C8C1B050E}"/>
               </a:ext>
             </a:extLst>
           </p:cNvPr>
@@ -1856,7 +1856,7 @@
           <p:cNvPr id="5" name="テキスト プレースホルダー 4">
             <a:extLst>
               <a:ext uri="{FF2B5EF4-FFF2-40B4-BE49-F238E27FC236}">
-                <a16:creationId xmlns:a16="http://schemas.microsoft.com/office/drawing/2014/main" id="{002EE8B9-8227-BD6F-A147-16A29890DF43}"/>
+                <a16:creationId xmlns:a16="http://schemas.microsoft.com/office/drawing/2014/main" id="{6CFD4071-084D-7AD9-435C-4D4FE2DF5A41}"/>
               </a:ext>
             </a:extLst>
           </p:cNvPr>
@@ -1927,7 +1927,7 @@
           <p:cNvPr id="6" name="コンテンツ プレースホルダー 5">
             <a:extLst>
               <a:ext uri="{FF2B5EF4-FFF2-40B4-BE49-F238E27FC236}">
-                <a16:creationId xmlns:a16="http://schemas.microsoft.com/office/drawing/2014/main" id="{C6337B0B-D656-EB13-A5AF-0429581EAF8B}"/>
+                <a16:creationId xmlns:a16="http://schemas.microsoft.com/office/drawing/2014/main" id="{716199A4-4069-D3EE-D6FB-0BF8D11F2D1B}"/>
               </a:ext>
             </a:extLst>
           </p:cNvPr>
@@ -2021,7 +2021,7 @@
           <p:cNvPr id="7" name="日付プレースホルダー 6">
             <a:extLst>
               <a:ext uri="{FF2B5EF4-FFF2-40B4-BE49-F238E27FC236}">
-                <a16:creationId xmlns:a16="http://schemas.microsoft.com/office/drawing/2014/main" id="{84BAECFC-4494-BE7E-711D-09D9C90E9519}"/>
+                <a16:creationId xmlns:a16="http://schemas.microsoft.com/office/drawing/2014/main" id="{92FE662D-BBBD-5F5B-EA50-F55F0399D4A4}"/>
               </a:ext>
             </a:extLst>
           </p:cNvPr>
@@ -2037,7 +2037,7 @@
           <a:bodyPr/>
           <a:lstStyle/>
           <a:p>
-            <a:fld id="{99CEBD03-1F00-4E29-8F45-768CA658975D}" type="datetimeFigureOut">
+            <a:fld id="{5E8F4A22-A18C-402B-B7CA-A3D7DAB0F12F}" type="datetimeFigureOut">
               <a:rPr kumimoji="1" lang="ja-JP" altLang="en-US" smtClean="0"/>
               <a:t>2026/7/30</a:t>
             </a:fld>
@@ -2050,7 +2050,7 @@
           <p:cNvPr id="8" name="フッター プレースホルダー 7">
             <a:extLst>
               <a:ext uri="{FF2B5EF4-FFF2-40B4-BE49-F238E27FC236}">
-                <a16:creationId xmlns:a16="http://schemas.microsoft.com/office/drawing/2014/main" id="{C09408F6-84CD-2593-879F-5BC94C1B01F6}"/>
+                <a16:creationId xmlns:a16="http://schemas.microsoft.com/office/drawing/2014/main" id="{CB1E2001-2ADC-9C54-F2B6-3F7AD97A3187}"/>
               </a:ext>
             </a:extLst>
           </p:cNvPr>
@@ -2075,7 +2075,7 @@
           <p:cNvPr id="9" name="スライド番号プレースホルダー 8">
             <a:extLst>
               <a:ext uri="{FF2B5EF4-FFF2-40B4-BE49-F238E27FC236}">
-                <a16:creationId xmlns:a16="http://schemas.microsoft.com/office/drawing/2014/main" id="{7B3C7B10-B352-FCE5-C540-720EF8EF8379}"/>
+                <a16:creationId xmlns:a16="http://schemas.microsoft.com/office/drawing/2014/main" id="{4D4365F6-0A0B-45D7-7525-D8886D995821}"/>
               </a:ext>
             </a:extLst>
           </p:cNvPr>
@@ -2091,7 +2091,7 @@
           <a:bodyPr/>
           <a:lstStyle/>
           <a:p>
-            <a:fld id="{4E1BC574-09EF-48DF-A299-EF5DC6E00DE3}" type="slidenum">
+            <a:fld id="{4431D062-010A-4A9F-9E50-F30F5795E17A}" type="slidenum">
               <a:rPr kumimoji="1" lang="ja-JP" altLang="en-US" smtClean="0"/>
               <a:t>‹#›</a:t>
             </a:fld>
@@ -2102,7 +2102,7 @@
     </p:spTree>
     <p:extLst>
       <p:ext uri="{BB962C8B-B14F-4D97-AF65-F5344CB8AC3E}">
-        <p14:creationId xmlns:p14="http://schemas.microsoft.com/office/powerpoint/2010/main" val="4100001498"/>
+        <p14:creationId xmlns:p14="http://schemas.microsoft.com/office/powerpoint/2010/main" val="41139222"/>
       </p:ext>
     </p:extLst>
   </p:cSld>
@@ -2134,7 +2134,7 @@
           <p:cNvPr id="2" name="タイトル 1">
             <a:extLst>
               <a:ext uri="{FF2B5EF4-FFF2-40B4-BE49-F238E27FC236}">
-                <a16:creationId xmlns:a16="http://schemas.microsoft.com/office/drawing/2014/main" id="{68B99BE8-D8AC-FEDE-5BA5-F0339FBC35FE}"/>
+                <a16:creationId xmlns:a16="http://schemas.microsoft.com/office/drawing/2014/main" id="{BD8B8811-956C-C545-BE6D-0BDFCF90D042}"/>
               </a:ext>
             </a:extLst>
           </p:cNvPr>
@@ -2162,7 +2162,7 @@
           <p:cNvPr id="3" name="日付プレースホルダー 2">
             <a:extLst>
               <a:ext uri="{FF2B5EF4-FFF2-40B4-BE49-F238E27FC236}">
-                <a16:creationId xmlns:a16="http://schemas.microsoft.com/office/drawing/2014/main" id="{AFE7C009-8847-4F47-81B6-01E162B9591D}"/>
+                <a16:creationId xmlns:a16="http://schemas.microsoft.com/office/drawing/2014/main" id="{CDAC3C68-1F2F-705F-8CFF-77D398C99DF0}"/>
               </a:ext>
             </a:extLst>
           </p:cNvPr>
@@ -2178,7 +2178,7 @@
           <a:bodyPr/>
           <a:lstStyle/>
           <a:p>
-            <a:fld id="{99CEBD03-1F00-4E29-8F45-768CA658975D}" type="datetimeFigureOut">
+            <a:fld id="{5E8F4A22-A18C-402B-B7CA-A3D7DAB0F12F}" type="datetimeFigureOut">
               <a:rPr kumimoji="1" lang="ja-JP" altLang="en-US" smtClean="0"/>
               <a:t>2026/7/30</a:t>
             </a:fld>
@@ -2191,7 +2191,7 @@
           <p:cNvPr id="4" name="フッター プレースホルダー 3">
             <a:extLst>
               <a:ext uri="{FF2B5EF4-FFF2-40B4-BE49-F238E27FC236}">
-                <a16:creationId xmlns:a16="http://schemas.microsoft.com/office/drawing/2014/main" id="{1D964AD3-F02A-C31A-6834-D88CDC6CA313}"/>
+                <a16:creationId xmlns:a16="http://schemas.microsoft.com/office/drawing/2014/main" id="{499F38EF-8BAC-8337-0594-8D8C282A3BE0}"/>
               </a:ext>
             </a:extLst>
           </p:cNvPr>
@@ -2216,7 +2216,7 @@
           <p:cNvPr id="5" name="スライド番号プレースホルダー 4">
             <a:extLst>
               <a:ext uri="{FF2B5EF4-FFF2-40B4-BE49-F238E27FC236}">
-                <a16:creationId xmlns:a16="http://schemas.microsoft.com/office/drawing/2014/main" id="{7C999B94-5509-8B38-625D-659A0C9C9CCD}"/>
+                <a16:creationId xmlns:a16="http://schemas.microsoft.com/office/drawing/2014/main" id="{1BB7861E-E059-F71C-87D2-D18FAE995A04}"/>
               </a:ext>
             </a:extLst>
           </p:cNvPr>
@@ -2232,7 +2232,7 @@
           <a:bodyPr/>
           <a:lstStyle/>
           <a:p>
-            <a:fld id="{4E1BC574-09EF-48DF-A299-EF5DC6E00DE3}" type="slidenum">
+            <a:fld id="{4431D062-010A-4A9F-9E50-F30F5795E17A}" type="slidenum">
               <a:rPr kumimoji="1" lang="ja-JP" altLang="en-US" smtClean="0"/>
               <a:t>‹#›</a:t>
             </a:fld>
@@ -2243,7 +2243,7 @@
     </p:spTree>
     <p:extLst>
       <p:ext uri="{BB962C8B-B14F-4D97-AF65-F5344CB8AC3E}">
-        <p14:creationId xmlns:p14="http://schemas.microsoft.com/office/powerpoint/2010/main" val="1204056204"/>
+        <p14:creationId xmlns:p14="http://schemas.microsoft.com/office/powerpoint/2010/main" val="2062915895"/>
       </p:ext>
     </p:extLst>
   </p:cSld>
@@ -2275,7 +2275,7 @@
           <p:cNvPr id="2" name="日付プレースホルダー 1">
             <a:extLst>
               <a:ext uri="{FF2B5EF4-FFF2-40B4-BE49-F238E27FC236}">
-                <a16:creationId xmlns:a16="http://schemas.microsoft.com/office/drawing/2014/main" id="{2BE759AD-3533-49E3-77CC-2C5F16647E64}"/>
+                <a16:creationId xmlns:a16="http://schemas.microsoft.com/office/drawing/2014/main" id="{D816125E-E3EA-182D-E62E-E7D036C48B00}"/>
               </a:ext>
             </a:extLst>
           </p:cNvPr>
@@ -2291,7 +2291,7 @@
           <a:bodyPr/>
           <a:lstStyle/>
           <a:p>
-            <a:fld id="{99CEBD03-1F00-4E29-8F45-768CA658975D}" type="datetimeFigureOut">
+            <a:fld id="{5E8F4A22-A18C-402B-B7CA-A3D7DAB0F12F}" type="datetimeFigureOut">
               <a:rPr kumimoji="1" lang="ja-JP" altLang="en-US" smtClean="0"/>
               <a:t>2026/7/30</a:t>
             </a:fld>
@@ -2304,7 +2304,7 @@
           <p:cNvPr id="3" name="フッター プレースホルダー 2">
             <a:extLst>
               <a:ext uri="{FF2B5EF4-FFF2-40B4-BE49-F238E27FC236}">
-                <a16:creationId xmlns:a16="http://schemas.microsoft.com/office/drawing/2014/main" id="{2149F54A-154F-5BB6-5598-65030754373B}"/>
+                <a16:creationId xmlns:a16="http://schemas.microsoft.com/office/drawing/2014/main" id="{03DB29F6-2FEF-70C0-AD5C-E413CEDA71E9}"/>
               </a:ext>
             </a:extLst>
           </p:cNvPr>
@@ -2329,7 +2329,7 @@
           <p:cNvPr id="4" name="スライド番号プレースホルダー 3">
             <a:extLst>
               <a:ext uri="{FF2B5EF4-FFF2-40B4-BE49-F238E27FC236}">
-                <a16:creationId xmlns:a16="http://schemas.microsoft.com/office/drawing/2014/main" id="{289A3DB4-38CC-6556-58E5-14E4C6216516}"/>
+                <a16:creationId xmlns:a16="http://schemas.microsoft.com/office/drawing/2014/main" id="{3BDC7805-C6E4-7E92-6F40-4A0943521EBA}"/>
               </a:ext>
             </a:extLst>
           </p:cNvPr>
@@ -2345,7 +2345,7 @@
           <a:bodyPr/>
           <a:lstStyle/>
           <a:p>
-            <a:fld id="{4E1BC574-09EF-48DF-A299-EF5DC6E00DE3}" type="slidenum">
+            <a:fld id="{4431D062-010A-4A9F-9E50-F30F5795E17A}" type="slidenum">
               <a:rPr kumimoji="1" lang="ja-JP" altLang="en-US" smtClean="0"/>
               <a:t>‹#›</a:t>
             </a:fld>
@@ -2356,7 +2356,7 @@
     </p:spTree>
     <p:extLst>
       <p:ext uri="{BB962C8B-B14F-4D97-AF65-F5344CB8AC3E}">
-        <p14:creationId xmlns:p14="http://schemas.microsoft.com/office/powerpoint/2010/main" val="2473166774"/>
+        <p14:creationId xmlns:p14="http://schemas.microsoft.com/office/powerpoint/2010/main" val="3751314429"/>
       </p:ext>
     </p:extLst>
   </p:cSld>
@@ -2388,7 +2388,7 @@
           <p:cNvPr id="2" name="タイトル 1">
             <a:extLst>
               <a:ext uri="{FF2B5EF4-FFF2-40B4-BE49-F238E27FC236}">
-                <a16:creationId xmlns:a16="http://schemas.microsoft.com/office/drawing/2014/main" id="{A159B1F0-8AFA-7DFE-E3B8-5DB9F9E29729}"/>
+                <a16:creationId xmlns:a16="http://schemas.microsoft.com/office/drawing/2014/main" id="{5EB01B99-22EB-7E94-6EBF-C14B8DEC0635}"/>
               </a:ext>
             </a:extLst>
           </p:cNvPr>
@@ -2425,7 +2425,7 @@
           <p:cNvPr id="3" name="コンテンツ プレースホルダー 2">
             <a:extLst>
               <a:ext uri="{FF2B5EF4-FFF2-40B4-BE49-F238E27FC236}">
-                <a16:creationId xmlns:a16="http://schemas.microsoft.com/office/drawing/2014/main" id="{845C5A23-B752-B42A-E031-4E4E7AE8CAEC}"/>
+                <a16:creationId xmlns:a16="http://schemas.microsoft.com/office/drawing/2014/main" id="{A9EC55F7-32FA-10C3-3F56-5511BA7744E7}"/>
               </a:ext>
             </a:extLst>
           </p:cNvPr>
@@ -2547,7 +2547,7 @@
           <p:cNvPr id="4" name="テキスト プレースホルダー 3">
             <a:extLst>
               <a:ext uri="{FF2B5EF4-FFF2-40B4-BE49-F238E27FC236}">
-                <a16:creationId xmlns:a16="http://schemas.microsoft.com/office/drawing/2014/main" id="{DAC2567D-D7EE-6F97-0175-E8EE5C65E0FE}"/>
+                <a16:creationId xmlns:a16="http://schemas.microsoft.com/office/drawing/2014/main" id="{A312C629-66F2-1045-2ECC-03DA30304BA8}"/>
               </a:ext>
             </a:extLst>
           </p:cNvPr>
@@ -2618,7 +2618,7 @@
           <p:cNvPr id="5" name="日付プレースホルダー 4">
             <a:extLst>
               <a:ext uri="{FF2B5EF4-FFF2-40B4-BE49-F238E27FC236}">
-                <a16:creationId xmlns:a16="http://schemas.microsoft.com/office/drawing/2014/main" id="{C48D9073-6F0F-ED1C-BE77-B226BCB16A5F}"/>
+                <a16:creationId xmlns:a16="http://schemas.microsoft.com/office/drawing/2014/main" id="{95ECEABD-E628-A926-034C-B5DA0CF835D1}"/>
               </a:ext>
             </a:extLst>
           </p:cNvPr>
@@ -2634,7 +2634,7 @@
           <a:bodyPr/>
           <a:lstStyle/>
           <a:p>
-            <a:fld id="{99CEBD03-1F00-4E29-8F45-768CA658975D}" type="datetimeFigureOut">
+            <a:fld id="{5E8F4A22-A18C-402B-B7CA-A3D7DAB0F12F}" type="datetimeFigureOut">
               <a:rPr kumimoji="1" lang="ja-JP" altLang="en-US" smtClean="0"/>
               <a:t>2026/7/30</a:t>
             </a:fld>
@@ -2647,7 +2647,7 @@
           <p:cNvPr id="6" name="フッター プレースホルダー 5">
             <a:extLst>
               <a:ext uri="{FF2B5EF4-FFF2-40B4-BE49-F238E27FC236}">
-                <a16:creationId xmlns:a16="http://schemas.microsoft.com/office/drawing/2014/main" id="{CB210D07-5BE6-4AB1-2AAF-8D6353AA6D12}"/>
+                <a16:creationId xmlns:a16="http://schemas.microsoft.com/office/drawing/2014/main" id="{396A5E9A-A4EC-00DA-DB01-2A66268CAECE}"/>
               </a:ext>
             </a:extLst>
           </p:cNvPr>
@@ -2672,7 +2672,7 @@
           <p:cNvPr id="7" name="スライド番号プレースホルダー 6">
             <a:extLst>
               <a:ext uri="{FF2B5EF4-FFF2-40B4-BE49-F238E27FC236}">
-                <a16:creationId xmlns:a16="http://schemas.microsoft.com/office/drawing/2014/main" id="{27F90E93-ABEE-9303-47D4-991D4CECF0BF}"/>
+                <a16:creationId xmlns:a16="http://schemas.microsoft.com/office/drawing/2014/main" id="{7EF4B2D2-FE14-6B44-937F-FF519A09847A}"/>
               </a:ext>
             </a:extLst>
           </p:cNvPr>
@@ -2688,7 +2688,7 @@
           <a:bodyPr/>
           <a:lstStyle/>
           <a:p>
-            <a:fld id="{4E1BC574-09EF-48DF-A299-EF5DC6E00DE3}" type="slidenum">
+            <a:fld id="{4431D062-010A-4A9F-9E50-F30F5795E17A}" type="slidenum">
               <a:rPr kumimoji="1" lang="ja-JP" altLang="en-US" smtClean="0"/>
               <a:t>‹#›</a:t>
             </a:fld>
@@ -2699,7 +2699,7 @@
     </p:spTree>
     <p:extLst>
       <p:ext uri="{BB962C8B-B14F-4D97-AF65-F5344CB8AC3E}">
-        <p14:creationId xmlns:p14="http://schemas.microsoft.com/office/powerpoint/2010/main" val="3229756500"/>
+        <p14:creationId xmlns:p14="http://schemas.microsoft.com/office/powerpoint/2010/main" val="1340795241"/>
       </p:ext>
     </p:extLst>
   </p:cSld>
@@ -2731,7 +2731,7 @@
           <p:cNvPr id="2" name="タイトル 1">
             <a:extLst>
               <a:ext uri="{FF2B5EF4-FFF2-40B4-BE49-F238E27FC236}">
-                <a16:creationId xmlns:a16="http://schemas.microsoft.com/office/drawing/2014/main" id="{175E7853-0327-389D-6366-B79833B6C01A}"/>
+                <a16:creationId xmlns:a16="http://schemas.microsoft.com/office/drawing/2014/main" id="{4C095456-0C1C-E578-FEAC-9DD1CB237611}"/>
               </a:ext>
             </a:extLst>
           </p:cNvPr>
@@ -2768,7 +2768,7 @@
           <p:cNvPr id="3" name="図プレースホルダー 2">
             <a:extLst>
               <a:ext uri="{FF2B5EF4-FFF2-40B4-BE49-F238E27FC236}">
-                <a16:creationId xmlns:a16="http://schemas.microsoft.com/office/drawing/2014/main" id="{B220B567-98AF-64D8-368E-36A5870D35B5}"/>
+                <a16:creationId xmlns:a16="http://schemas.microsoft.com/office/drawing/2014/main" id="{33993662-5543-9487-94DE-A4656B47D64D}"/>
               </a:ext>
             </a:extLst>
           </p:cNvPr>
@@ -2835,7 +2835,7 @@
           <p:cNvPr id="4" name="テキスト プレースホルダー 3">
             <a:extLst>
               <a:ext uri="{FF2B5EF4-FFF2-40B4-BE49-F238E27FC236}">
-                <a16:creationId xmlns:a16="http://schemas.microsoft.com/office/drawing/2014/main" id="{B97AFCE5-43B5-5D93-45C2-9D3C7E3E2766}"/>
+                <a16:creationId xmlns:a16="http://schemas.microsoft.com/office/drawing/2014/main" id="{93E181CA-695C-3E98-F3B2-4D6DAE4D1048}"/>
               </a:ext>
             </a:extLst>
           </p:cNvPr>
@@ -2906,7 +2906,7 @@
           <p:cNvPr id="5" name="日付プレースホルダー 4">
             <a:extLst>
               <a:ext uri="{FF2B5EF4-FFF2-40B4-BE49-F238E27FC236}">
-                <a16:creationId xmlns:a16="http://schemas.microsoft.com/office/drawing/2014/main" id="{29418099-0FBC-0711-185C-7351681EE8BD}"/>
+                <a16:creationId xmlns:a16="http://schemas.microsoft.com/office/drawing/2014/main" id="{4217A162-EAB3-79AA-CC86-F492E36CE330}"/>
               </a:ext>
             </a:extLst>
           </p:cNvPr>
@@ -2922,7 +2922,7 @@
           <a:bodyPr/>
           <a:lstStyle/>
           <a:p>
-            <a:fld id="{99CEBD03-1F00-4E29-8F45-768CA658975D}" type="datetimeFigureOut">
+            <a:fld id="{5E8F4A22-A18C-402B-B7CA-A3D7DAB0F12F}" type="datetimeFigureOut">
               <a:rPr kumimoji="1" lang="ja-JP" altLang="en-US" smtClean="0"/>
               <a:t>2026/7/30</a:t>
             </a:fld>
@@ -2935,7 +2935,7 @@
           <p:cNvPr id="6" name="フッター プレースホルダー 5">
             <a:extLst>
               <a:ext uri="{FF2B5EF4-FFF2-40B4-BE49-F238E27FC236}">
-                <a16:creationId xmlns:a16="http://schemas.microsoft.com/office/drawing/2014/main" id="{E66D4BED-C4A5-7981-154E-4508749E128A}"/>
+                <a16:creationId xmlns:a16="http://schemas.microsoft.com/office/drawing/2014/main" id="{E75467E6-BA26-131A-FAB5-D3619BB97BDB}"/>
               </a:ext>
             </a:extLst>
           </p:cNvPr>
@@ -2960,7 +2960,7 @@
           <p:cNvPr id="7" name="スライド番号プレースホルダー 6">
             <a:extLst>
               <a:ext uri="{FF2B5EF4-FFF2-40B4-BE49-F238E27FC236}">
-                <a16:creationId xmlns:a16="http://schemas.microsoft.com/office/drawing/2014/main" id="{FF980AB0-6B91-D70E-1C67-10106AB0033B}"/>
+                <a16:creationId xmlns:a16="http://schemas.microsoft.com/office/drawing/2014/main" id="{F7EC28BB-CA27-3D02-8700-4A727727A2D7}"/>
               </a:ext>
             </a:extLst>
           </p:cNvPr>
@@ -2976,7 +2976,7 @@
           <a:bodyPr/>
           <a:lstStyle/>
           <a:p>
-            <a:fld id="{4E1BC574-09EF-48DF-A299-EF5DC6E00DE3}" type="slidenum">
+            <a:fld id="{4431D062-010A-4A9F-9E50-F30F5795E17A}" type="slidenum">
               <a:rPr kumimoji="1" lang="ja-JP" altLang="en-US" smtClean="0"/>
               <a:t>‹#›</a:t>
             </a:fld>
@@ -2987,7 +2987,7 @@
     </p:spTree>
     <p:extLst>
       <p:ext uri="{BB962C8B-B14F-4D97-AF65-F5344CB8AC3E}">
-        <p14:creationId xmlns:p14="http://schemas.microsoft.com/office/powerpoint/2010/main" val="795491208"/>
+        <p14:creationId xmlns:p14="http://schemas.microsoft.com/office/powerpoint/2010/main" val="3109829645"/>
       </p:ext>
     </p:extLst>
   </p:cSld>
@@ -3024,7 +3024,7 @@
           <p:cNvPr id="2" name="タイトル プレースホルダー 1">
             <a:extLst>
               <a:ext uri="{FF2B5EF4-FFF2-40B4-BE49-F238E27FC236}">
-                <a16:creationId xmlns:a16="http://schemas.microsoft.com/office/drawing/2014/main" id="{171A09E7-A874-4FD2-084D-10E2FB929AFE}"/>
+                <a16:creationId xmlns:a16="http://schemas.microsoft.com/office/drawing/2014/main" id="{53942404-5BE4-5C49-8A2F-B1D128BEB649}"/>
               </a:ext>
             </a:extLst>
           </p:cNvPr>
@@ -3062,7 +3062,7 @@
           <p:cNvPr id="3" name="テキスト プレースホルダー 2">
             <a:extLst>
               <a:ext uri="{FF2B5EF4-FFF2-40B4-BE49-F238E27FC236}">
-                <a16:creationId xmlns:a16="http://schemas.microsoft.com/office/drawing/2014/main" id="{F5A4673E-A999-EA4C-066F-3468565CAE9F}"/>
+                <a16:creationId xmlns:a16="http://schemas.microsoft.com/office/drawing/2014/main" id="{B4BAD786-67DC-9F98-AECD-E69BCF4F8083}"/>
               </a:ext>
             </a:extLst>
           </p:cNvPr>
@@ -3161,7 +3161,7 @@
           <p:cNvPr id="4" name="日付プレースホルダー 3">
             <a:extLst>
               <a:ext uri="{FF2B5EF4-FFF2-40B4-BE49-F238E27FC236}">
-                <a16:creationId xmlns:a16="http://schemas.microsoft.com/office/drawing/2014/main" id="{B98693F0-E4E3-4CB6-94E3-55242C948611}"/>
+                <a16:creationId xmlns:a16="http://schemas.microsoft.com/office/drawing/2014/main" id="{9F1A3EBB-D6EC-9EF4-384E-4596DAC5D688}"/>
               </a:ext>
             </a:extLst>
           </p:cNvPr>
@@ -3195,7 +3195,7 @@
             </a:lvl1pPr>
           </a:lstStyle>
           <a:p>
-            <a:fld id="{99CEBD03-1F00-4E29-8F45-768CA658975D}" type="datetimeFigureOut">
+            <a:fld id="{5E8F4A22-A18C-402B-B7CA-A3D7DAB0F12F}" type="datetimeFigureOut">
               <a:rPr kumimoji="1" lang="ja-JP" altLang="en-US" smtClean="0"/>
               <a:t>2026/7/30</a:t>
             </a:fld>
@@ -3208,7 +3208,7 @@
           <p:cNvPr id="5" name="フッター プレースホルダー 4">
             <a:extLst>
               <a:ext uri="{FF2B5EF4-FFF2-40B4-BE49-F238E27FC236}">
-                <a16:creationId xmlns:a16="http://schemas.microsoft.com/office/drawing/2014/main" id="{2C0B10E1-DB3D-AC24-E042-A3E60F703C0F}"/>
+                <a16:creationId xmlns:a16="http://schemas.microsoft.com/office/drawing/2014/main" id="{6F91C932-4B3F-092D-FB59-A3FBD9FC6E33}"/>
               </a:ext>
             </a:extLst>
           </p:cNvPr>
@@ -3251,7 +3251,7 @@
           <p:cNvPr id="6" name="スライド番号プレースホルダー 5">
             <a:extLst>
               <a:ext uri="{FF2B5EF4-FFF2-40B4-BE49-F238E27FC236}">
-                <a16:creationId xmlns:a16="http://schemas.microsoft.com/office/drawing/2014/main" id="{83A675A8-494D-BB74-F611-670BE225E693}"/>
+                <a16:creationId xmlns:a16="http://schemas.microsoft.com/office/drawing/2014/main" id="{1B27F4CB-68E0-8E02-3920-199B9AC4D7E9}"/>
               </a:ext>
             </a:extLst>
           </p:cNvPr>
@@ -3285,7 +3285,7 @@
             </a:lvl1pPr>
           </a:lstStyle>
           <a:p>
-            <a:fld id="{4E1BC574-09EF-48DF-A299-EF5DC6E00DE3}" type="slidenum">
+            <a:fld id="{4431D062-010A-4A9F-9E50-F30F5795E17A}" type="slidenum">
               <a:rPr kumimoji="1" lang="ja-JP" altLang="en-US" smtClean="0"/>
               <a:t>‹#›</a:t>
             </a:fld>
@@ -3296,7 +3296,7 @@
     </p:spTree>
     <p:extLst>
       <p:ext uri="{BB962C8B-B14F-4D97-AF65-F5344CB8AC3E}">
-        <p14:creationId xmlns:p14="http://schemas.microsoft.com/office/powerpoint/2010/main" val="3019115911"/>
+        <p14:creationId xmlns:p14="http://schemas.microsoft.com/office/powerpoint/2010/main" val="2184285589"/>
       </p:ext>
     </p:extLst>
   </p:cSld>
@@ -3619,7 +3619,7 @@
           <p:cNvPr id="2" name="テキスト ボックス 1">
             <a:extLst>
               <a:ext uri="{FF2B5EF4-FFF2-40B4-BE49-F238E27FC236}">
-                <a16:creationId xmlns:a16="http://schemas.microsoft.com/office/drawing/2014/main" id="{A43ECB5A-49C0-2CC0-923F-0FC0865D2F7D}"/>
+                <a16:creationId xmlns:a16="http://schemas.microsoft.com/office/drawing/2014/main" id="{484880EE-0FD9-8410-01F1-2BFE21DB2C8C}"/>
               </a:ext>
             </a:extLst>
           </p:cNvPr>
@@ -3665,7 +3665,7 @@
           <p:cNvPr id="3" name="テキスト ボックス 2">
             <a:extLst>
               <a:ext uri="{FF2B5EF4-FFF2-40B4-BE49-F238E27FC236}">
-                <a16:creationId xmlns:a16="http://schemas.microsoft.com/office/drawing/2014/main" id="{E36E414C-09E0-DCE4-E8FA-3838E1BFD85F}"/>
+                <a16:creationId xmlns:a16="http://schemas.microsoft.com/office/drawing/2014/main" id="{FA6D7F1C-8F7B-7375-282C-EADAA5DCA969}"/>
               </a:ext>
             </a:extLst>
           </p:cNvPr>
@@ -3695,14 +3695,17 @@
                 </a:solidFill>
                 <a:latin typeface="Arial" panose="020B0604020202020204" pitchFamily="34" charset="0"/>
               </a:rPr>
-              <a:t>chutonavi TECH EXPLANATION</a:t>
-            </a:r>
-            <a:endParaRPr kumimoji="1" lang="ja-JP" altLang="en-US" sz="3400" b="1">
-              <a:solidFill>
-                <a:srgbClr val="111111"/>
-              </a:solidFill>
-              <a:latin typeface="Arial" panose="020B0604020202020204" pitchFamily="34" charset="0"/>
-            </a:endParaRPr>
+              <a:t>Chutonavi</a:t>
+            </a:r>
+            <a:r>
+              <a:rPr kumimoji="1" lang="ja-JP" altLang="en-US" sz="3400" b="1">
+                <a:solidFill>
+                  <a:srgbClr val="111111"/>
+                </a:solidFill>
+                <a:latin typeface="Arial" panose="020B0604020202020204" pitchFamily="34" charset="0"/>
+              </a:rPr>
+              <a:t>の技術解説</a:t>
+            </a:r>
           </a:p>
         </p:txBody>
       </p:sp>
@@ -3711,7 +3714,7 @@
           <p:cNvPr id="4" name="テキスト ボックス 3">
             <a:extLst>
               <a:ext uri="{FF2B5EF4-FFF2-40B4-BE49-F238E27FC236}">
-                <a16:creationId xmlns:a16="http://schemas.microsoft.com/office/drawing/2014/main" id="{8691A1AD-71BC-EC50-7B9A-20AA7CBF9C76}"/>
+                <a16:creationId xmlns:a16="http://schemas.microsoft.com/office/drawing/2014/main" id="{B8B509C2-84B2-2952-7E25-001DB0D9DD47}"/>
               </a:ext>
             </a:extLst>
           </p:cNvPr>
@@ -3735,20 +3738,14 @@
           <a:lstStyle/>
           <a:p>
             <a:r>
-              <a:rPr kumimoji="1" lang="en-US" altLang="ja-JP" sz="2000">
+              <a:rPr kumimoji="1" lang="ja-JP" altLang="en-US" sz="2000">
                 <a:solidFill>
                   <a:srgbClr val="333333"/>
                 </a:solidFill>
                 <a:latin typeface="Arial" panose="020B0604020202020204" pitchFamily="34" charset="0"/>
               </a:rPr>
-              <a:t>Architecture, implementation and commit history in 75 seconds</a:t>
-            </a:r>
-            <a:endParaRPr kumimoji="1" lang="ja-JP" altLang="en-US" sz="2000">
-              <a:solidFill>
-                <a:srgbClr val="333333"/>
-              </a:solidFill>
-              <a:latin typeface="Arial" panose="020B0604020202020204" pitchFamily="34" charset="0"/>
-            </a:endParaRPr>
+              <a:t>設計・実装・コミットから学ぶ短時間プレビュー</a:t>
+            </a:r>
           </a:p>
         </p:txBody>
       </p:sp>
@@ -3757,7 +3754,7 @@
           <p:cNvPr id="5" name="テキスト ボックス 4">
             <a:extLst>
               <a:ext uri="{FF2B5EF4-FFF2-40B4-BE49-F238E27FC236}">
-                <a16:creationId xmlns:a16="http://schemas.microsoft.com/office/drawing/2014/main" id="{C020A3A3-6687-18BF-1C97-080420E08B11}"/>
+                <a16:creationId xmlns:a16="http://schemas.microsoft.com/office/drawing/2014/main" id="{22D47B45-E41F-DFE4-4B06-F7588DD5ACD9}"/>
               </a:ext>
             </a:extLst>
           </p:cNvPr>
@@ -3804,7 +3801,7 @@
             <a:hlinkClick r:id="" action="ppaction://media"/>
             <a:extLst>
               <a:ext uri="{FF2B5EF4-FFF2-40B4-BE49-F238E27FC236}">
-                <a16:creationId xmlns:a16="http://schemas.microsoft.com/office/drawing/2014/main" id="{F05C81F3-2654-CB94-C2A7-6B98D4819D26}"/>
+                <a16:creationId xmlns:a16="http://schemas.microsoft.com/office/drawing/2014/main" id="{C839E884-42E9-A23B-8661-3A58FD49A768}"/>
               </a:ext>
             </a:extLst>
           </p:cNvPr>
@@ -3839,7 +3836,7 @@
     </p:spTree>
     <p:extLst>
       <p:ext uri="{BB962C8B-B14F-4D97-AF65-F5344CB8AC3E}">
-        <p14:creationId xmlns:p14="http://schemas.microsoft.com/office/powerpoint/2010/main" val="869886228"/>
+        <p14:creationId xmlns:p14="http://schemas.microsoft.com/office/powerpoint/2010/main" val="2122895696"/>
       </p:ext>
     </p:extLst>
   </p:cSld>
@@ -3963,7 +3960,7 @@
           <p:cNvPr id="2" name="テキスト ボックス 1">
             <a:extLst>
               <a:ext uri="{FF2B5EF4-FFF2-40B4-BE49-F238E27FC236}">
-                <a16:creationId xmlns:a16="http://schemas.microsoft.com/office/drawing/2014/main" id="{2E308F4D-D122-D914-2D74-B3DC6CB70853}"/>
+                <a16:creationId xmlns:a16="http://schemas.microsoft.com/office/drawing/2014/main" id="{F4786580-D24E-711C-E7DA-11F0E46454E0}"/>
               </a:ext>
             </a:extLst>
           </p:cNvPr>
@@ -4009,7 +4006,7 @@
           <p:cNvPr id="3" name="テキスト ボックス 2">
             <a:extLst>
               <a:ext uri="{FF2B5EF4-FFF2-40B4-BE49-F238E27FC236}">
-                <a16:creationId xmlns:a16="http://schemas.microsoft.com/office/drawing/2014/main" id="{DDE5742A-7597-51F5-77AF-CE973B07BCBC}"/>
+                <a16:creationId xmlns:a16="http://schemas.microsoft.com/office/drawing/2014/main" id="{A22198FC-062A-FD81-526D-E05A188FA542}"/>
               </a:ext>
             </a:extLst>
           </p:cNvPr>
@@ -4033,20 +4030,14 @@
           <a:lstStyle/>
           <a:p>
             <a:r>
-              <a:rPr kumimoji="1" lang="en-US" altLang="ja-JP" sz="3400" b="1">
+              <a:rPr kumimoji="1" lang="ja-JP" altLang="en-US" sz="3400" b="1">
                 <a:solidFill>
                   <a:srgbClr val="111111"/>
                 </a:solidFill>
                 <a:latin typeface="Arial" panose="020B0604020202020204" pitchFamily="34" charset="0"/>
               </a:rPr>
-              <a:t>WHAT DOES IT SOLVE?</a:t>
-            </a:r>
-            <a:endParaRPr kumimoji="1" lang="ja-JP" altLang="en-US" sz="3400" b="1">
-              <a:solidFill>
-                <a:srgbClr val="111111"/>
-              </a:solidFill>
-              <a:latin typeface="Arial" panose="020B0604020202020204" pitchFamily="34" charset="0"/>
-            </a:endParaRPr>
+              <a:t>このプロジェクトは何を解決する？</a:t>
+            </a:r>
           </a:p>
         </p:txBody>
       </p:sp>
@@ -4055,7 +4046,7 @@
           <p:cNvPr id="4" name="テキスト ボックス 3">
             <a:extLst>
               <a:ext uri="{FF2B5EF4-FFF2-40B4-BE49-F238E27FC236}">
-                <a16:creationId xmlns:a16="http://schemas.microsoft.com/office/drawing/2014/main" id="{725E5D5B-B18E-2C68-B071-05636DE9D0BF}"/>
+                <a16:creationId xmlns:a16="http://schemas.microsoft.com/office/drawing/2014/main" id="{79705CCC-331E-C2A5-C67F-CB9E3E24ABD7}"/>
               </a:ext>
             </a:extLst>
           </p:cNvPr>
@@ -4104,7 +4095,7 @@
           <p:cNvPr id="5" name="テキスト ボックス 4">
             <a:extLst>
               <a:ext uri="{FF2B5EF4-FFF2-40B4-BE49-F238E27FC236}">
-                <a16:creationId xmlns:a16="http://schemas.microsoft.com/office/drawing/2014/main" id="{156176E5-9A79-3654-5A8E-885B8FBB73B6}"/>
+                <a16:creationId xmlns:a16="http://schemas.microsoft.com/office/drawing/2014/main" id="{85F98D39-4C3E-3D91-1B14-3F5EC8A5F0D3}"/>
               </a:ext>
             </a:extLst>
           </p:cNvPr>
@@ -4151,7 +4142,7 @@
             <a:hlinkClick r:id="" action="ppaction://media"/>
             <a:extLst>
               <a:ext uri="{FF2B5EF4-FFF2-40B4-BE49-F238E27FC236}">
-                <a16:creationId xmlns:a16="http://schemas.microsoft.com/office/drawing/2014/main" id="{2805F121-1833-D87F-988F-288FD43B52C2}"/>
+                <a16:creationId xmlns:a16="http://schemas.microsoft.com/office/drawing/2014/main" id="{8BF97569-99C0-5F23-FA34-2B5680A40D3C}"/>
               </a:ext>
             </a:extLst>
           </p:cNvPr>
@@ -4186,7 +4177,7 @@
     </p:spTree>
     <p:extLst>
       <p:ext uri="{BB962C8B-B14F-4D97-AF65-F5344CB8AC3E}">
-        <p14:creationId xmlns:p14="http://schemas.microsoft.com/office/powerpoint/2010/main" val="2363117241"/>
+        <p14:creationId xmlns:p14="http://schemas.microsoft.com/office/powerpoint/2010/main" val="2004299105"/>
       </p:ext>
     </p:extLst>
   </p:cSld>
@@ -4310,7 +4301,7 @@
           <p:cNvPr id="2" name="テキスト ボックス 1">
             <a:extLst>
               <a:ext uri="{FF2B5EF4-FFF2-40B4-BE49-F238E27FC236}">
-                <a16:creationId xmlns:a16="http://schemas.microsoft.com/office/drawing/2014/main" id="{4509BCCF-9AA0-BF38-4623-B1BD29148D52}"/>
+                <a16:creationId xmlns:a16="http://schemas.microsoft.com/office/drawing/2014/main" id="{744EE270-3A2E-5B11-0455-6832203BAA0C}"/>
               </a:ext>
             </a:extLst>
           </p:cNvPr>
@@ -4356,7 +4347,7 @@
           <p:cNvPr id="3" name="テキスト ボックス 2">
             <a:extLst>
               <a:ext uri="{FF2B5EF4-FFF2-40B4-BE49-F238E27FC236}">
-                <a16:creationId xmlns:a16="http://schemas.microsoft.com/office/drawing/2014/main" id="{20720C9E-D92C-FA88-8ED2-F552960C4EBB}"/>
+                <a16:creationId xmlns:a16="http://schemas.microsoft.com/office/drawing/2014/main" id="{0F536979-0246-3CD1-CC1A-780EF39AB61B}"/>
               </a:ext>
             </a:extLst>
           </p:cNvPr>
@@ -4380,20 +4371,14 @@
           <a:lstStyle/>
           <a:p>
             <a:r>
-              <a:rPr kumimoji="1" lang="en-US" altLang="ja-JP" sz="3400" b="1">
+              <a:rPr kumimoji="1" lang="ja-JP" altLang="en-US" sz="3400" b="1">
                 <a:solidFill>
                   <a:srgbClr val="111111"/>
                 </a:solidFill>
                 <a:latin typeface="Arial" panose="020B0604020202020204" pitchFamily="34" charset="0"/>
               </a:rPr>
-              <a:t>TECH STACK</a:t>
-            </a:r>
-            <a:endParaRPr kumimoji="1" lang="ja-JP" altLang="en-US" sz="3400" b="1">
-              <a:solidFill>
-                <a:srgbClr val="111111"/>
-              </a:solidFill>
-              <a:latin typeface="Arial" panose="020B0604020202020204" pitchFamily="34" charset="0"/>
-            </a:endParaRPr>
+              <a:t>技術スタック</a:t>
+            </a:r>
           </a:p>
         </p:txBody>
       </p:sp>
@@ -4402,7 +4387,7 @@
           <p:cNvPr id="4" name="テキスト ボックス 3">
             <a:extLst>
               <a:ext uri="{FF2B5EF4-FFF2-40B4-BE49-F238E27FC236}">
-                <a16:creationId xmlns:a16="http://schemas.microsoft.com/office/drawing/2014/main" id="{22CBC01C-5200-22EE-7E52-580C1B79CC7C}"/>
+                <a16:creationId xmlns:a16="http://schemas.microsoft.com/office/drawing/2014/main" id="{CD0D261E-3F37-8FC4-8BF0-846C6307D270}"/>
               </a:ext>
             </a:extLst>
           </p:cNvPr>
@@ -4412,7 +4397,7 @@
         <p:spPr>
           <a:xfrm>
             <a:off x="533400" y="3429000"/>
-            <a:ext cx="10795000" cy="400110"/>
+            <a:ext cx="10795000" cy="707886"/>
           </a:xfrm>
           <a:prstGeom prst="rect">
             <a:avLst/>
@@ -4426,22 +4411,14 @@
           <a:lstStyle/>
           <a:p>
             <a:r>
-              <a:rPr kumimoji="1" lang="en-US" altLang="ja-JP" sz="2000">
-                <a:solidFill>
-                  <a:srgbClr val="333333"/>
-                </a:solidFill>
-                <a:latin typeface="Arial" panose="020B0604020202020204" pitchFamily="34" charset="0"/>
-              </a:rPr>
-              <a:t>Primary technologies: </a:t>
-            </a:r>
-            <a:r>
               <a:rPr kumimoji="1" lang="ja-JP" altLang="en-US" sz="2000">
                 <a:solidFill>
                   <a:srgbClr val="333333"/>
                 </a:solidFill>
                 <a:latin typeface="Arial" panose="020B0604020202020204" pitchFamily="34" charset="0"/>
               </a:rPr>
-              <a:t>未分類</a:t>
+              <a:t>主要技術：未分類
+役割を分け、保守しやすい構成を目指しています。</a:t>
             </a:r>
           </a:p>
         </p:txBody>
@@ -4451,7 +4428,7 @@
           <p:cNvPr id="5" name="テキスト ボックス 4">
             <a:extLst>
               <a:ext uri="{FF2B5EF4-FFF2-40B4-BE49-F238E27FC236}">
-                <a16:creationId xmlns:a16="http://schemas.microsoft.com/office/drawing/2014/main" id="{AF971793-5078-BBA7-2348-13079F3AB139}"/>
+                <a16:creationId xmlns:a16="http://schemas.microsoft.com/office/drawing/2014/main" id="{DCAA65E3-85B9-035B-E7CA-F4331271D7AF}"/>
               </a:ext>
             </a:extLst>
           </p:cNvPr>
@@ -4498,7 +4475,7 @@
             <a:hlinkClick r:id="" action="ppaction://media"/>
             <a:extLst>
               <a:ext uri="{FF2B5EF4-FFF2-40B4-BE49-F238E27FC236}">
-                <a16:creationId xmlns:a16="http://schemas.microsoft.com/office/drawing/2014/main" id="{AF95D07F-4DBB-9783-FA78-5AD2330EC372}"/>
+                <a16:creationId xmlns:a16="http://schemas.microsoft.com/office/drawing/2014/main" id="{9A2ADEF6-F3CB-9295-D37A-15585627D26C}"/>
               </a:ext>
             </a:extLst>
           </p:cNvPr>
@@ -4533,7 +4510,7 @@
     </p:spTree>
     <p:extLst>
       <p:ext uri="{BB962C8B-B14F-4D97-AF65-F5344CB8AC3E}">
-        <p14:creationId xmlns:p14="http://schemas.microsoft.com/office/powerpoint/2010/main" val="1656025316"/>
+        <p14:creationId xmlns:p14="http://schemas.microsoft.com/office/powerpoint/2010/main" val="574740572"/>
       </p:ext>
     </p:extLst>
   </p:cSld>
@@ -4657,7 +4634,7 @@
           <p:cNvPr id="2" name="テキスト ボックス 1">
             <a:extLst>
               <a:ext uri="{FF2B5EF4-FFF2-40B4-BE49-F238E27FC236}">
-                <a16:creationId xmlns:a16="http://schemas.microsoft.com/office/drawing/2014/main" id="{2C59911F-DAAD-4670-6BFE-E289FC9E92CE}"/>
+                <a16:creationId xmlns:a16="http://schemas.microsoft.com/office/drawing/2014/main" id="{FD0D450B-EED1-587D-FC04-FE8ECBC7CB34}"/>
               </a:ext>
             </a:extLst>
           </p:cNvPr>
@@ -4703,7 +4680,7 @@
           <p:cNvPr id="3" name="テキスト ボックス 2">
             <a:extLst>
               <a:ext uri="{FF2B5EF4-FFF2-40B4-BE49-F238E27FC236}">
-                <a16:creationId xmlns:a16="http://schemas.microsoft.com/office/drawing/2014/main" id="{45B2D9E0-6F69-BB28-F18A-AED98B58340F}"/>
+                <a16:creationId xmlns:a16="http://schemas.microsoft.com/office/drawing/2014/main" id="{882638B5-9047-2074-EF19-D544FED0149B}"/>
               </a:ext>
             </a:extLst>
           </p:cNvPr>
@@ -4727,20 +4704,14 @@
           <a:lstStyle/>
           <a:p>
             <a:r>
-              <a:rPr kumimoji="1" lang="en-US" altLang="ja-JP" sz="3400" b="1">
+              <a:rPr kumimoji="1" lang="ja-JP" altLang="en-US" sz="3400" b="1">
                 <a:solidFill>
                   <a:srgbClr val="111111"/>
                 </a:solidFill>
                 <a:latin typeface="Arial" panose="020B0604020202020204" pitchFamily="34" charset="0"/>
               </a:rPr>
-              <a:t>REPOSITORY HIGHLIGHTS</a:t>
-            </a:r>
-            <a:endParaRPr kumimoji="1" lang="ja-JP" altLang="en-US" sz="3400" b="1">
-              <a:solidFill>
-                <a:srgbClr val="111111"/>
-              </a:solidFill>
-              <a:latin typeface="Arial" panose="020B0604020202020204" pitchFamily="34" charset="0"/>
-            </a:endParaRPr>
+              <a:t>リポジトリの読みどころ</a:t>
+            </a:r>
           </a:p>
         </p:txBody>
       </p:sp>
@@ -4749,7 +4720,7 @@
           <p:cNvPr id="4" name="テキスト ボックス 3">
             <a:extLst>
               <a:ext uri="{FF2B5EF4-FFF2-40B4-BE49-F238E27FC236}">
-                <a16:creationId xmlns:a16="http://schemas.microsoft.com/office/drawing/2014/main" id="{E49B7B0B-A65E-2443-8776-CD048079C906}"/>
+                <a16:creationId xmlns:a16="http://schemas.microsoft.com/office/drawing/2014/main" id="{976C0594-5B3C-DF60-DEC4-FBAD63D34DD7}"/>
               </a:ext>
             </a:extLst>
           </p:cNvPr>
@@ -4759,7 +4730,7 @@
         <p:spPr>
           <a:xfrm>
             <a:off x="533400" y="3429000"/>
-            <a:ext cx="10795000" cy="400110"/>
+            <a:ext cx="10795000" cy="707886"/>
           </a:xfrm>
           <a:prstGeom prst="rect">
             <a:avLst/>
@@ -4773,20 +4744,33 @@
           <a:lstStyle/>
           <a:p>
             <a:r>
+              <a:rPr kumimoji="1" lang="ja-JP" altLang="en-US" sz="2000">
+                <a:solidFill>
+                  <a:srgbClr val="333333"/>
+                </a:solidFill>
+                <a:latin typeface="Arial" panose="020B0604020202020204" pitchFamily="34" charset="0"/>
+              </a:rPr>
+              <a:t>公開コード、</a:t>
+            </a:r>
+            <a:r>
               <a:rPr kumimoji="1" lang="en-US" altLang="ja-JP" sz="2000">
                 <a:solidFill>
                   <a:srgbClr val="333333"/>
                 </a:solidFill>
                 <a:latin typeface="Arial" panose="020B0604020202020204" pitchFamily="34" charset="0"/>
               </a:rPr>
-              <a:t>Public source code, README and commit history reveal the design decisions.</a:t>
-            </a:r>
-            <a:endParaRPr kumimoji="1" lang="ja-JP" altLang="en-US" sz="2000">
-              <a:solidFill>
-                <a:srgbClr val="333333"/>
-              </a:solidFill>
-              <a:latin typeface="Arial" panose="020B0604020202020204" pitchFamily="34" charset="0"/>
-            </a:endParaRPr>
+              <a:t>README</a:t>
+            </a:r>
+            <a:r>
+              <a:rPr kumimoji="1" lang="ja-JP" altLang="en-US" sz="2000">
+                <a:solidFill>
+                  <a:srgbClr val="333333"/>
+                </a:solidFill>
+                <a:latin typeface="Arial" panose="020B0604020202020204" pitchFamily="34" charset="0"/>
+              </a:rPr>
+              <a:t>、コミット履歴から設計判断を確認できます。
+主なファイル：主要なソースファイル</a:t>
+            </a:r>
           </a:p>
         </p:txBody>
       </p:sp>
@@ -4795,7 +4779,7 @@
           <p:cNvPr id="5" name="テキスト ボックス 4">
             <a:extLst>
               <a:ext uri="{FF2B5EF4-FFF2-40B4-BE49-F238E27FC236}">
-                <a16:creationId xmlns:a16="http://schemas.microsoft.com/office/drawing/2014/main" id="{0DC6EDFD-1478-1844-4AC5-9F7B702748AB}"/>
+                <a16:creationId xmlns:a16="http://schemas.microsoft.com/office/drawing/2014/main" id="{FB6FC1B2-54BC-908D-B2F8-B2E55D15731E}"/>
               </a:ext>
             </a:extLst>
           </p:cNvPr>
@@ -4842,7 +4826,7 @@
             <a:hlinkClick r:id="" action="ppaction://media"/>
             <a:extLst>
               <a:ext uri="{FF2B5EF4-FFF2-40B4-BE49-F238E27FC236}">
-                <a16:creationId xmlns:a16="http://schemas.microsoft.com/office/drawing/2014/main" id="{8AC578A8-8F4D-16B3-E80A-D491D0A7BE58}"/>
+                <a16:creationId xmlns:a16="http://schemas.microsoft.com/office/drawing/2014/main" id="{5B4A0A40-E9E5-175C-10AC-C859D0B434C7}"/>
               </a:ext>
             </a:extLst>
           </p:cNvPr>
@@ -4877,7 +4861,7 @@
     </p:spTree>
     <p:extLst>
       <p:ext uri="{BB962C8B-B14F-4D97-AF65-F5344CB8AC3E}">
-        <p14:creationId xmlns:p14="http://schemas.microsoft.com/office/powerpoint/2010/main" val="2311684177"/>
+        <p14:creationId xmlns:p14="http://schemas.microsoft.com/office/powerpoint/2010/main" val="3028088431"/>
       </p:ext>
     </p:extLst>
   </p:cSld>
@@ -5001,7 +4985,7 @@
           <p:cNvPr id="2" name="テキスト ボックス 1">
             <a:extLst>
               <a:ext uri="{FF2B5EF4-FFF2-40B4-BE49-F238E27FC236}">
-                <a16:creationId xmlns:a16="http://schemas.microsoft.com/office/drawing/2014/main" id="{EAF21224-0833-A051-A1C1-D5E8D65BAE53}"/>
+                <a16:creationId xmlns:a16="http://schemas.microsoft.com/office/drawing/2014/main" id="{6D9B55CF-5803-492A-9D39-C58AA6CACED4}"/>
               </a:ext>
             </a:extLst>
           </p:cNvPr>
@@ -5047,7 +5031,7 @@
           <p:cNvPr id="3" name="テキスト ボックス 2">
             <a:extLst>
               <a:ext uri="{FF2B5EF4-FFF2-40B4-BE49-F238E27FC236}">
-                <a16:creationId xmlns:a16="http://schemas.microsoft.com/office/drawing/2014/main" id="{F245FC2E-E0FB-3246-6890-C8E5B3516347}"/>
+                <a16:creationId xmlns:a16="http://schemas.microsoft.com/office/drawing/2014/main" id="{6CA713CC-BBE2-178B-0243-8073D1B35DD6}"/>
               </a:ext>
             </a:extLst>
           </p:cNvPr>
@@ -5071,20 +5055,14 @@
           <a:lstStyle/>
           <a:p>
             <a:r>
-              <a:rPr kumimoji="1" lang="en-US" altLang="ja-JP" sz="3400" b="1">
+              <a:rPr kumimoji="1" lang="ja-JP" altLang="en-US" sz="3400" b="1">
                 <a:solidFill>
                   <a:srgbClr val="111111"/>
                 </a:solidFill>
                 <a:latin typeface="Arial" panose="020B0604020202020204" pitchFamily="34" charset="0"/>
               </a:rPr>
-              <a:t>ITERATIVE IMPROVEMENT</a:t>
-            </a:r>
-            <a:endParaRPr kumimoji="1" lang="ja-JP" altLang="en-US" sz="3400" b="1">
-              <a:solidFill>
-                <a:srgbClr val="111111"/>
-              </a:solidFill>
-              <a:latin typeface="Arial" panose="020B0604020202020204" pitchFamily="34" charset="0"/>
-            </a:endParaRPr>
+              <a:t>コミットから分かる改善</a:t>
+            </a:r>
           </a:p>
         </p:txBody>
       </p:sp>
@@ -5093,7 +5071,7 @@
           <p:cNvPr id="4" name="テキスト ボックス 3">
             <a:extLst>
               <a:ext uri="{FF2B5EF4-FFF2-40B4-BE49-F238E27FC236}">
-                <a16:creationId xmlns:a16="http://schemas.microsoft.com/office/drawing/2014/main" id="{E42C73A1-20AB-A395-AF85-8A0343E813D6}"/>
+                <a16:creationId xmlns:a16="http://schemas.microsoft.com/office/drawing/2014/main" id="{7EC4DF2F-C6CB-BD8F-B4A7-0BFF58CDBD83}"/>
               </a:ext>
             </a:extLst>
           </p:cNvPr>
@@ -5123,7 +5101,7 @@
                 </a:solidFill>
                 <a:latin typeface="Arial" panose="020B0604020202020204" pitchFamily="34" charset="0"/>
               </a:rPr>
-              <a:t>Small commits continuously improve features, quality and release readiness.</a:t>
+              <a:t>chore: initialize repository</a:t>
             </a:r>
             <a:endParaRPr kumimoji="1" lang="ja-JP" altLang="en-US" sz="2000">
               <a:solidFill>
@@ -5139,7 +5117,7 @@
           <p:cNvPr id="5" name="テキスト ボックス 4">
             <a:extLst>
               <a:ext uri="{FF2B5EF4-FFF2-40B4-BE49-F238E27FC236}">
-                <a16:creationId xmlns:a16="http://schemas.microsoft.com/office/drawing/2014/main" id="{2B20C5C2-06FB-D3EF-F7E3-9852800B060E}"/>
+                <a16:creationId xmlns:a16="http://schemas.microsoft.com/office/drawing/2014/main" id="{960A45FD-6D34-825C-FF1A-601974969C04}"/>
               </a:ext>
             </a:extLst>
           </p:cNvPr>
@@ -5186,7 +5164,7 @@
             <a:hlinkClick r:id="" action="ppaction://media"/>
             <a:extLst>
               <a:ext uri="{FF2B5EF4-FFF2-40B4-BE49-F238E27FC236}">
-                <a16:creationId xmlns:a16="http://schemas.microsoft.com/office/drawing/2014/main" id="{7F211167-F287-A245-2009-7A53F8DC221E}"/>
+                <a16:creationId xmlns:a16="http://schemas.microsoft.com/office/drawing/2014/main" id="{AE552317-7866-F6C8-AF7E-FA7F8148F8F1}"/>
               </a:ext>
             </a:extLst>
           </p:cNvPr>
@@ -5221,7 +5199,7 @@
     </p:spTree>
     <p:extLst>
       <p:ext uri="{BB962C8B-B14F-4D97-AF65-F5344CB8AC3E}">
-        <p14:creationId xmlns:p14="http://schemas.microsoft.com/office/powerpoint/2010/main" val="340234297"/>
+        <p14:creationId xmlns:p14="http://schemas.microsoft.com/office/powerpoint/2010/main" val="2993820730"/>
       </p:ext>
     </p:extLst>
   </p:cSld>
@@ -5345,7 +5323,7 @@
           <p:cNvPr id="2" name="テキスト ボックス 1">
             <a:extLst>
               <a:ext uri="{FF2B5EF4-FFF2-40B4-BE49-F238E27FC236}">
-                <a16:creationId xmlns:a16="http://schemas.microsoft.com/office/drawing/2014/main" id="{078B5FA8-F991-0CD7-6901-2083F9D05693}"/>
+                <a16:creationId xmlns:a16="http://schemas.microsoft.com/office/drawing/2014/main" id="{7CC4F4E6-C760-05F1-6EAC-4C1668786811}"/>
               </a:ext>
             </a:extLst>
           </p:cNvPr>
@@ -5391,7 +5369,7 @@
           <p:cNvPr id="3" name="テキスト ボックス 2">
             <a:extLst>
               <a:ext uri="{FF2B5EF4-FFF2-40B4-BE49-F238E27FC236}">
-                <a16:creationId xmlns:a16="http://schemas.microsoft.com/office/drawing/2014/main" id="{F8394845-516F-B0F3-FAC0-4C50FF843CD4}"/>
+                <a16:creationId xmlns:a16="http://schemas.microsoft.com/office/drawing/2014/main" id="{B74F6460-F997-5964-290B-4372805ED631}"/>
               </a:ext>
             </a:extLst>
           </p:cNvPr>
@@ -5415,20 +5393,14 @@
           <a:lstStyle/>
           <a:p>
             <a:r>
-              <a:rPr kumimoji="1" lang="en-US" altLang="ja-JP" sz="3400" b="1">
+              <a:rPr kumimoji="1" lang="ja-JP" altLang="en-US" sz="3400" b="1">
                 <a:solidFill>
                   <a:srgbClr val="111111"/>
                 </a:solidFill>
                 <a:latin typeface="Arial" panose="020B0604020202020204" pitchFamily="34" charset="0"/>
               </a:rPr>
-              <a:t>READ THE FULL ARTICLE</a:t>
-            </a:r>
-            <a:endParaRPr kumimoji="1" lang="ja-JP" altLang="en-US" sz="3400" b="1">
-              <a:solidFill>
-                <a:srgbClr val="111111"/>
-              </a:solidFill>
-              <a:latin typeface="Arial" panose="020B0604020202020204" pitchFamily="34" charset="0"/>
-            </a:endParaRPr>
+              <a:t>詳しくは積み上げログへ</a:t>
+            </a:r>
           </a:p>
         </p:txBody>
       </p:sp>
@@ -5437,7 +5409,7 @@
           <p:cNvPr id="4" name="テキスト ボックス 3">
             <a:extLst>
               <a:ext uri="{FF2B5EF4-FFF2-40B4-BE49-F238E27FC236}">
-                <a16:creationId xmlns:a16="http://schemas.microsoft.com/office/drawing/2014/main" id="{ADB5E039-0322-4EE8-4F80-C063C4323846}"/>
+                <a16:creationId xmlns:a16="http://schemas.microsoft.com/office/drawing/2014/main" id="{A14D2E3C-354B-1591-71FF-4E06ACD73765}"/>
               </a:ext>
             </a:extLst>
           </p:cNvPr>
@@ -5461,14 +5433,32 @@
           <a:lstStyle/>
           <a:p>
             <a:r>
-              <a:rPr kumimoji="1" lang="sv-SE" altLang="ja-JP" sz="2000">
+              <a:rPr kumimoji="1" lang="zh-TW" altLang="en-US" sz="2000">
+                <a:solidFill>
+                  <a:srgbClr val="333333"/>
+                </a:solidFill>
+                <a:latin typeface="Arial" panose="020B0604020202020204" pitchFamily="34" charset="0"/>
+              </a:rPr>
+              <a:t>記事： </a:t>
+            </a:r>
+            <a:r>
+              <a:rPr kumimoji="1" lang="en-US" altLang="zh-TW" sz="2000">
                 <a:solidFill>
                   <a:srgbClr val="333333"/>
                 </a:solidFill>
                 <a:latin typeface="Arial" panose="020B0604020202020204" pitchFamily="34" charset="0"/>
               </a:rPr>
               <a:t>https://syunnjack.dev/articles/chutonavi
-TSUMIAGE LOG</a:t>
+</a:t>
+            </a:r>
+            <a:r>
+              <a:rPr kumimoji="1" lang="zh-TW" altLang="en-US" sz="2000">
+                <a:solidFill>
+                  <a:srgbClr val="333333"/>
+                </a:solidFill>
+                <a:latin typeface="Arial" panose="020B0604020202020204" pitchFamily="34" charset="0"/>
+              </a:rPr>
+              <a:t>学び、作り、振り返る開発記録。</a:t>
             </a:r>
             <a:endParaRPr kumimoji="1" lang="ja-JP" altLang="en-US" sz="2000">
               <a:solidFill>
@@ -5484,7 +5474,7 @@
           <p:cNvPr id="5" name="テキスト ボックス 4">
             <a:extLst>
               <a:ext uri="{FF2B5EF4-FFF2-40B4-BE49-F238E27FC236}">
-                <a16:creationId xmlns:a16="http://schemas.microsoft.com/office/drawing/2014/main" id="{265F83BB-5D27-FC73-C6B1-30A38E7B13ED}"/>
+                <a16:creationId xmlns:a16="http://schemas.microsoft.com/office/drawing/2014/main" id="{09B71D65-1925-65C0-7ED3-020BA3E6DD68}"/>
               </a:ext>
             </a:extLst>
           </p:cNvPr>
@@ -5531,7 +5521,7 @@
             <a:hlinkClick r:id="" action="ppaction://media"/>
             <a:extLst>
               <a:ext uri="{FF2B5EF4-FFF2-40B4-BE49-F238E27FC236}">
-                <a16:creationId xmlns:a16="http://schemas.microsoft.com/office/drawing/2014/main" id="{04204534-A081-8967-28F9-68757A3303CA}"/>
+                <a16:creationId xmlns:a16="http://schemas.microsoft.com/office/drawing/2014/main" id="{F2AA515E-2000-6CDD-76A1-20984C4FE3D4}"/>
               </a:ext>
             </a:extLst>
           </p:cNvPr>
@@ -5566,7 +5556,7 @@
     </p:spTree>
     <p:extLst>
       <p:ext uri="{BB962C8B-B14F-4D97-AF65-F5344CB8AC3E}">
-        <p14:creationId xmlns:p14="http://schemas.microsoft.com/office/powerpoint/2010/main" val="2720906216"/>
+        <p14:creationId xmlns:p14="http://schemas.microsoft.com/office/powerpoint/2010/main" val="1355107997"/>
       </p:ext>
     </p:extLst>
   </p:cSld>

--- a/public/videos/repositories/chutonavi/chutonavi-tech-preview.pptx
+++ b/public/videos/repositories/chutonavi/chutonavi-tech-preview.pptx
@@ -134,7 +134,7 @@
           <p:cNvPr id="2" name="タイトル 1">
             <a:extLst>
               <a:ext uri="{FF2B5EF4-FFF2-40B4-BE49-F238E27FC236}">
-                <a16:creationId xmlns:a16="http://schemas.microsoft.com/office/drawing/2014/main" id="{00D2098D-9033-748E-19A4-5E0E5A792373}"/>
+                <a16:creationId xmlns:a16="http://schemas.microsoft.com/office/drawing/2014/main" id="{733FA629-DA75-6B23-8CD0-B99CA08670C5}"/>
               </a:ext>
             </a:extLst>
           </p:cNvPr>
@@ -171,7 +171,7 @@
           <p:cNvPr id="3" name="字幕 2">
             <a:extLst>
               <a:ext uri="{FF2B5EF4-FFF2-40B4-BE49-F238E27FC236}">
-                <a16:creationId xmlns:a16="http://schemas.microsoft.com/office/drawing/2014/main" id="{6DBF6CFD-BEBC-DEC9-BAA2-547047B587C7}"/>
+                <a16:creationId xmlns:a16="http://schemas.microsoft.com/office/drawing/2014/main" id="{4578AFC8-E440-9296-2D94-D4975FC5B387}"/>
               </a:ext>
             </a:extLst>
           </p:cNvPr>
@@ -241,7 +241,7 @@
           <p:cNvPr id="4" name="日付プレースホルダー 3">
             <a:extLst>
               <a:ext uri="{FF2B5EF4-FFF2-40B4-BE49-F238E27FC236}">
-                <a16:creationId xmlns:a16="http://schemas.microsoft.com/office/drawing/2014/main" id="{28CD24D6-9C4A-FD54-203A-E647B86D74EF}"/>
+                <a16:creationId xmlns:a16="http://schemas.microsoft.com/office/drawing/2014/main" id="{EA1CAE03-6232-E232-ECF4-6B716742DCD1}"/>
               </a:ext>
             </a:extLst>
           </p:cNvPr>
@@ -257,7 +257,7 @@
           <a:bodyPr/>
           <a:lstStyle/>
           <a:p>
-            <a:fld id="{5E8F4A22-A18C-402B-B7CA-A3D7DAB0F12F}" type="datetimeFigureOut">
+            <a:fld id="{1B49A6B7-8275-4D70-8097-DAA8B1A1BCE2}" type="datetimeFigureOut">
               <a:rPr kumimoji="1" lang="ja-JP" altLang="en-US" smtClean="0"/>
               <a:t>2026/7/30</a:t>
             </a:fld>
@@ -270,7 +270,7 @@
           <p:cNvPr id="5" name="フッター プレースホルダー 4">
             <a:extLst>
               <a:ext uri="{FF2B5EF4-FFF2-40B4-BE49-F238E27FC236}">
-                <a16:creationId xmlns:a16="http://schemas.microsoft.com/office/drawing/2014/main" id="{B49D3DA7-75F1-5215-129E-15CD27366EBB}"/>
+                <a16:creationId xmlns:a16="http://schemas.microsoft.com/office/drawing/2014/main" id="{E6201FF2-B97C-75F3-D35F-E319F72A67BC}"/>
               </a:ext>
             </a:extLst>
           </p:cNvPr>
@@ -295,7 +295,7 @@
           <p:cNvPr id="6" name="スライド番号プレースホルダー 5">
             <a:extLst>
               <a:ext uri="{FF2B5EF4-FFF2-40B4-BE49-F238E27FC236}">
-                <a16:creationId xmlns:a16="http://schemas.microsoft.com/office/drawing/2014/main" id="{96437476-073A-8286-DE0A-C3CB0CB5042A}"/>
+                <a16:creationId xmlns:a16="http://schemas.microsoft.com/office/drawing/2014/main" id="{9A2B9AB4-488E-6429-8ADE-D66E88EED036}"/>
               </a:ext>
             </a:extLst>
           </p:cNvPr>
@@ -311,7 +311,7 @@
           <a:bodyPr/>
           <a:lstStyle/>
           <a:p>
-            <a:fld id="{4431D062-010A-4A9F-9E50-F30F5795E17A}" type="slidenum">
+            <a:fld id="{CB7EF21F-3340-450A-AE9B-0B1F8E7183E5}" type="slidenum">
               <a:rPr kumimoji="1" lang="ja-JP" altLang="en-US" smtClean="0"/>
               <a:t>‹#›</a:t>
             </a:fld>
@@ -322,7 +322,7 @@
     </p:spTree>
     <p:extLst>
       <p:ext uri="{BB962C8B-B14F-4D97-AF65-F5344CB8AC3E}">
-        <p14:creationId xmlns:p14="http://schemas.microsoft.com/office/powerpoint/2010/main" val="3644371883"/>
+        <p14:creationId xmlns:p14="http://schemas.microsoft.com/office/powerpoint/2010/main" val="4267582477"/>
       </p:ext>
     </p:extLst>
   </p:cSld>
@@ -354,7 +354,7 @@
           <p:cNvPr id="2" name="タイトル 1">
             <a:extLst>
               <a:ext uri="{FF2B5EF4-FFF2-40B4-BE49-F238E27FC236}">
-                <a16:creationId xmlns:a16="http://schemas.microsoft.com/office/drawing/2014/main" id="{3E970EB6-0369-6BCF-A9DD-428B76E83943}"/>
+                <a16:creationId xmlns:a16="http://schemas.microsoft.com/office/drawing/2014/main" id="{94C1443C-FFD9-94E2-E740-B1242FD71545}"/>
               </a:ext>
             </a:extLst>
           </p:cNvPr>
@@ -382,7 +382,7 @@
           <p:cNvPr id="3" name="縦書きテキスト プレースホルダー 2">
             <a:extLst>
               <a:ext uri="{FF2B5EF4-FFF2-40B4-BE49-F238E27FC236}">
-                <a16:creationId xmlns:a16="http://schemas.microsoft.com/office/drawing/2014/main" id="{5AF400D0-61B1-1EFB-55C0-4DAB594104FE}"/>
+                <a16:creationId xmlns:a16="http://schemas.microsoft.com/office/drawing/2014/main" id="{D47CD16A-0455-D6C5-D3A5-05EBBF8E2BC8}"/>
               </a:ext>
             </a:extLst>
           </p:cNvPr>
@@ -471,7 +471,7 @@
           <p:cNvPr id="4" name="日付プレースホルダー 3">
             <a:extLst>
               <a:ext uri="{FF2B5EF4-FFF2-40B4-BE49-F238E27FC236}">
-                <a16:creationId xmlns:a16="http://schemas.microsoft.com/office/drawing/2014/main" id="{75AAD74E-5AAB-DE35-8AB2-1950EA21A708}"/>
+                <a16:creationId xmlns:a16="http://schemas.microsoft.com/office/drawing/2014/main" id="{E09CE4CD-03A7-3747-E9A7-E3B33352E23D}"/>
               </a:ext>
             </a:extLst>
           </p:cNvPr>
@@ -487,7 +487,7 @@
           <a:bodyPr/>
           <a:lstStyle/>
           <a:p>
-            <a:fld id="{5E8F4A22-A18C-402B-B7CA-A3D7DAB0F12F}" type="datetimeFigureOut">
+            <a:fld id="{1B49A6B7-8275-4D70-8097-DAA8B1A1BCE2}" type="datetimeFigureOut">
               <a:rPr kumimoji="1" lang="ja-JP" altLang="en-US" smtClean="0"/>
               <a:t>2026/7/30</a:t>
             </a:fld>
@@ -500,7 +500,7 @@
           <p:cNvPr id="5" name="フッター プレースホルダー 4">
             <a:extLst>
               <a:ext uri="{FF2B5EF4-FFF2-40B4-BE49-F238E27FC236}">
-                <a16:creationId xmlns:a16="http://schemas.microsoft.com/office/drawing/2014/main" id="{C0C8B998-7610-5430-4177-9116F8304CF2}"/>
+                <a16:creationId xmlns:a16="http://schemas.microsoft.com/office/drawing/2014/main" id="{E3E232E9-4C60-A4E2-B0CC-76DBF4FB7838}"/>
               </a:ext>
             </a:extLst>
           </p:cNvPr>
@@ -525,7 +525,7 @@
           <p:cNvPr id="6" name="スライド番号プレースホルダー 5">
             <a:extLst>
               <a:ext uri="{FF2B5EF4-FFF2-40B4-BE49-F238E27FC236}">
-                <a16:creationId xmlns:a16="http://schemas.microsoft.com/office/drawing/2014/main" id="{F7D1AD66-0F8E-35EE-3343-5287CD353A81}"/>
+                <a16:creationId xmlns:a16="http://schemas.microsoft.com/office/drawing/2014/main" id="{D4D4CA9E-5BD0-B253-9843-C364EAD93342}"/>
               </a:ext>
             </a:extLst>
           </p:cNvPr>
@@ -541,7 +541,7 @@
           <a:bodyPr/>
           <a:lstStyle/>
           <a:p>
-            <a:fld id="{4431D062-010A-4A9F-9E50-F30F5795E17A}" type="slidenum">
+            <a:fld id="{CB7EF21F-3340-450A-AE9B-0B1F8E7183E5}" type="slidenum">
               <a:rPr kumimoji="1" lang="ja-JP" altLang="en-US" smtClean="0"/>
               <a:t>‹#›</a:t>
             </a:fld>
@@ -552,7 +552,7 @@
     </p:spTree>
     <p:extLst>
       <p:ext uri="{BB962C8B-B14F-4D97-AF65-F5344CB8AC3E}">
-        <p14:creationId xmlns:p14="http://schemas.microsoft.com/office/powerpoint/2010/main" val="69721661"/>
+        <p14:creationId xmlns:p14="http://schemas.microsoft.com/office/powerpoint/2010/main" val="748991244"/>
       </p:ext>
     </p:extLst>
   </p:cSld>
@@ -584,7 +584,7 @@
           <p:cNvPr id="2" name="縦書きタイトル 1">
             <a:extLst>
               <a:ext uri="{FF2B5EF4-FFF2-40B4-BE49-F238E27FC236}">
-                <a16:creationId xmlns:a16="http://schemas.microsoft.com/office/drawing/2014/main" id="{61D3BC68-CE22-98E9-CF50-E559FB3E53E2}"/>
+                <a16:creationId xmlns:a16="http://schemas.microsoft.com/office/drawing/2014/main" id="{275ADE62-B827-B14D-7309-3346727847E2}"/>
               </a:ext>
             </a:extLst>
           </p:cNvPr>
@@ -617,7 +617,7 @@
           <p:cNvPr id="3" name="縦書きテキスト プレースホルダー 2">
             <a:extLst>
               <a:ext uri="{FF2B5EF4-FFF2-40B4-BE49-F238E27FC236}">
-                <a16:creationId xmlns:a16="http://schemas.microsoft.com/office/drawing/2014/main" id="{E3ACED0F-1AB0-F19B-9A77-5E272A44584B}"/>
+                <a16:creationId xmlns:a16="http://schemas.microsoft.com/office/drawing/2014/main" id="{57E13FD8-4C48-A67C-C716-A33CE2274D15}"/>
               </a:ext>
             </a:extLst>
           </p:cNvPr>
@@ -711,7 +711,7 @@
           <p:cNvPr id="4" name="日付プレースホルダー 3">
             <a:extLst>
               <a:ext uri="{FF2B5EF4-FFF2-40B4-BE49-F238E27FC236}">
-                <a16:creationId xmlns:a16="http://schemas.microsoft.com/office/drawing/2014/main" id="{91D3B356-189D-D826-529C-0A144BA9C0EC}"/>
+                <a16:creationId xmlns:a16="http://schemas.microsoft.com/office/drawing/2014/main" id="{EAF25CA6-3B8C-BC27-E7F9-052A310C3CE9}"/>
               </a:ext>
             </a:extLst>
           </p:cNvPr>
@@ -727,7 +727,7 @@
           <a:bodyPr/>
           <a:lstStyle/>
           <a:p>
-            <a:fld id="{5E8F4A22-A18C-402B-B7CA-A3D7DAB0F12F}" type="datetimeFigureOut">
+            <a:fld id="{1B49A6B7-8275-4D70-8097-DAA8B1A1BCE2}" type="datetimeFigureOut">
               <a:rPr kumimoji="1" lang="ja-JP" altLang="en-US" smtClean="0"/>
               <a:t>2026/7/30</a:t>
             </a:fld>
@@ -740,7 +740,7 @@
           <p:cNvPr id="5" name="フッター プレースホルダー 4">
             <a:extLst>
               <a:ext uri="{FF2B5EF4-FFF2-40B4-BE49-F238E27FC236}">
-                <a16:creationId xmlns:a16="http://schemas.microsoft.com/office/drawing/2014/main" id="{DF89743F-75D1-1377-19D3-A91368A38360}"/>
+                <a16:creationId xmlns:a16="http://schemas.microsoft.com/office/drawing/2014/main" id="{F5EE1B64-3D6A-82A3-9928-D655F8FE6EDC}"/>
               </a:ext>
             </a:extLst>
           </p:cNvPr>
@@ -765,7 +765,7 @@
           <p:cNvPr id="6" name="スライド番号プレースホルダー 5">
             <a:extLst>
               <a:ext uri="{FF2B5EF4-FFF2-40B4-BE49-F238E27FC236}">
-                <a16:creationId xmlns:a16="http://schemas.microsoft.com/office/drawing/2014/main" id="{C3591822-036E-6616-6F5C-DB8A874331C6}"/>
+                <a16:creationId xmlns:a16="http://schemas.microsoft.com/office/drawing/2014/main" id="{B0A70FF3-7D45-8440-E85C-69E900BC1BDC}"/>
               </a:ext>
             </a:extLst>
           </p:cNvPr>
@@ -781,7 +781,7 @@
           <a:bodyPr/>
           <a:lstStyle/>
           <a:p>
-            <a:fld id="{4431D062-010A-4A9F-9E50-F30F5795E17A}" type="slidenum">
+            <a:fld id="{CB7EF21F-3340-450A-AE9B-0B1F8E7183E5}" type="slidenum">
               <a:rPr kumimoji="1" lang="ja-JP" altLang="en-US" smtClean="0"/>
               <a:t>‹#›</a:t>
             </a:fld>
@@ -792,7 +792,7 @@
     </p:spTree>
     <p:extLst>
       <p:ext uri="{BB962C8B-B14F-4D97-AF65-F5344CB8AC3E}">
-        <p14:creationId xmlns:p14="http://schemas.microsoft.com/office/powerpoint/2010/main" val="3651262716"/>
+        <p14:creationId xmlns:p14="http://schemas.microsoft.com/office/powerpoint/2010/main" val="426442516"/>
       </p:ext>
     </p:extLst>
   </p:cSld>
@@ -824,7 +824,7 @@
           <p:cNvPr id="2" name="タイトル 1">
             <a:extLst>
               <a:ext uri="{FF2B5EF4-FFF2-40B4-BE49-F238E27FC236}">
-                <a16:creationId xmlns:a16="http://schemas.microsoft.com/office/drawing/2014/main" id="{3F852353-F662-32EB-1AC7-76DC8A8AC10E}"/>
+                <a16:creationId xmlns:a16="http://schemas.microsoft.com/office/drawing/2014/main" id="{F960FA26-42E1-5C35-388E-952B88714B8F}"/>
               </a:ext>
             </a:extLst>
           </p:cNvPr>
@@ -852,7 +852,7 @@
           <p:cNvPr id="3" name="コンテンツ プレースホルダー 2">
             <a:extLst>
               <a:ext uri="{FF2B5EF4-FFF2-40B4-BE49-F238E27FC236}">
-                <a16:creationId xmlns:a16="http://schemas.microsoft.com/office/drawing/2014/main" id="{3DBACD27-402C-ABC4-496F-4A7E02865575}"/>
+                <a16:creationId xmlns:a16="http://schemas.microsoft.com/office/drawing/2014/main" id="{1B3812A6-1D7C-541A-DAF8-4E0E7C7B5C00}"/>
               </a:ext>
             </a:extLst>
           </p:cNvPr>
@@ -941,7 +941,7 @@
           <p:cNvPr id="4" name="日付プレースホルダー 3">
             <a:extLst>
               <a:ext uri="{FF2B5EF4-FFF2-40B4-BE49-F238E27FC236}">
-                <a16:creationId xmlns:a16="http://schemas.microsoft.com/office/drawing/2014/main" id="{174E5E93-B070-5D5D-1948-E0A6F552BCF3}"/>
+                <a16:creationId xmlns:a16="http://schemas.microsoft.com/office/drawing/2014/main" id="{7734F06E-23BA-04FE-41C0-1B15D400AEE4}"/>
               </a:ext>
             </a:extLst>
           </p:cNvPr>
@@ -957,7 +957,7 @@
           <a:bodyPr/>
           <a:lstStyle/>
           <a:p>
-            <a:fld id="{5E8F4A22-A18C-402B-B7CA-A3D7DAB0F12F}" type="datetimeFigureOut">
+            <a:fld id="{1B49A6B7-8275-4D70-8097-DAA8B1A1BCE2}" type="datetimeFigureOut">
               <a:rPr kumimoji="1" lang="ja-JP" altLang="en-US" smtClean="0"/>
               <a:t>2026/7/30</a:t>
             </a:fld>
@@ -970,7 +970,7 @@
           <p:cNvPr id="5" name="フッター プレースホルダー 4">
             <a:extLst>
               <a:ext uri="{FF2B5EF4-FFF2-40B4-BE49-F238E27FC236}">
-                <a16:creationId xmlns:a16="http://schemas.microsoft.com/office/drawing/2014/main" id="{68D9E9B4-65ED-EC76-DFD8-9AC57042170E}"/>
+                <a16:creationId xmlns:a16="http://schemas.microsoft.com/office/drawing/2014/main" id="{69113DA9-4341-2E50-72A8-54DE6B2522EB}"/>
               </a:ext>
             </a:extLst>
           </p:cNvPr>
@@ -995,7 +995,7 @@
           <p:cNvPr id="6" name="スライド番号プレースホルダー 5">
             <a:extLst>
               <a:ext uri="{FF2B5EF4-FFF2-40B4-BE49-F238E27FC236}">
-                <a16:creationId xmlns:a16="http://schemas.microsoft.com/office/drawing/2014/main" id="{C864C769-DE32-95F8-105B-10133EA81A99}"/>
+                <a16:creationId xmlns:a16="http://schemas.microsoft.com/office/drawing/2014/main" id="{D19F575D-720A-4244-E8A0-9310723CB5BB}"/>
               </a:ext>
             </a:extLst>
           </p:cNvPr>
@@ -1011,7 +1011,7 @@
           <a:bodyPr/>
           <a:lstStyle/>
           <a:p>
-            <a:fld id="{4431D062-010A-4A9F-9E50-F30F5795E17A}" type="slidenum">
+            <a:fld id="{CB7EF21F-3340-450A-AE9B-0B1F8E7183E5}" type="slidenum">
               <a:rPr kumimoji="1" lang="ja-JP" altLang="en-US" smtClean="0"/>
               <a:t>‹#›</a:t>
             </a:fld>
@@ -1022,7 +1022,7 @@
     </p:spTree>
     <p:extLst>
       <p:ext uri="{BB962C8B-B14F-4D97-AF65-F5344CB8AC3E}">
-        <p14:creationId xmlns:p14="http://schemas.microsoft.com/office/powerpoint/2010/main" val="1366829875"/>
+        <p14:creationId xmlns:p14="http://schemas.microsoft.com/office/powerpoint/2010/main" val="4288992026"/>
       </p:ext>
     </p:extLst>
   </p:cSld>
@@ -1054,7 +1054,7 @@
           <p:cNvPr id="2" name="タイトル 1">
             <a:extLst>
               <a:ext uri="{FF2B5EF4-FFF2-40B4-BE49-F238E27FC236}">
-                <a16:creationId xmlns:a16="http://schemas.microsoft.com/office/drawing/2014/main" id="{8217B8A3-CAC0-3EA5-4F69-615CE1B0EDB2}"/>
+                <a16:creationId xmlns:a16="http://schemas.microsoft.com/office/drawing/2014/main" id="{69B80E24-631B-8BCB-830A-C5E35E8B478A}"/>
               </a:ext>
             </a:extLst>
           </p:cNvPr>
@@ -1091,7 +1091,7 @@
           <p:cNvPr id="3" name="テキスト プレースホルダー 2">
             <a:extLst>
               <a:ext uri="{FF2B5EF4-FFF2-40B4-BE49-F238E27FC236}">
-                <a16:creationId xmlns:a16="http://schemas.microsoft.com/office/drawing/2014/main" id="{2BE27F43-76A2-3CBF-BD77-F7733875B3DD}"/>
+                <a16:creationId xmlns:a16="http://schemas.microsoft.com/office/drawing/2014/main" id="{06AEF635-D649-A5B1-B6C4-A2F7290A7AE1}"/>
               </a:ext>
             </a:extLst>
           </p:cNvPr>
@@ -1216,7 +1216,7 @@
           <p:cNvPr id="4" name="日付プレースホルダー 3">
             <a:extLst>
               <a:ext uri="{FF2B5EF4-FFF2-40B4-BE49-F238E27FC236}">
-                <a16:creationId xmlns:a16="http://schemas.microsoft.com/office/drawing/2014/main" id="{D4FCA0BA-50FA-40BD-ED16-9B0DB2A6130B}"/>
+                <a16:creationId xmlns:a16="http://schemas.microsoft.com/office/drawing/2014/main" id="{2346A40D-279C-E3B4-3C64-37D1CAC9713F}"/>
               </a:ext>
             </a:extLst>
           </p:cNvPr>
@@ -1232,7 +1232,7 @@
           <a:bodyPr/>
           <a:lstStyle/>
           <a:p>
-            <a:fld id="{5E8F4A22-A18C-402B-B7CA-A3D7DAB0F12F}" type="datetimeFigureOut">
+            <a:fld id="{1B49A6B7-8275-4D70-8097-DAA8B1A1BCE2}" type="datetimeFigureOut">
               <a:rPr kumimoji="1" lang="ja-JP" altLang="en-US" smtClean="0"/>
               <a:t>2026/7/30</a:t>
             </a:fld>
@@ -1245,7 +1245,7 @@
           <p:cNvPr id="5" name="フッター プレースホルダー 4">
             <a:extLst>
               <a:ext uri="{FF2B5EF4-FFF2-40B4-BE49-F238E27FC236}">
-                <a16:creationId xmlns:a16="http://schemas.microsoft.com/office/drawing/2014/main" id="{34C789EC-C6EA-60CD-5426-3D29C9279550}"/>
+                <a16:creationId xmlns:a16="http://schemas.microsoft.com/office/drawing/2014/main" id="{C58930C8-0DFC-5BEE-3293-D2802C13715E}"/>
               </a:ext>
             </a:extLst>
           </p:cNvPr>
@@ -1270,7 +1270,7 @@
           <p:cNvPr id="6" name="スライド番号プレースホルダー 5">
             <a:extLst>
               <a:ext uri="{FF2B5EF4-FFF2-40B4-BE49-F238E27FC236}">
-                <a16:creationId xmlns:a16="http://schemas.microsoft.com/office/drawing/2014/main" id="{1DE99A7A-3AE2-231A-3B21-11059B2DE4AE}"/>
+                <a16:creationId xmlns:a16="http://schemas.microsoft.com/office/drawing/2014/main" id="{5172D4CA-9C9E-9871-E720-A2875A448E7F}"/>
               </a:ext>
             </a:extLst>
           </p:cNvPr>
@@ -1286,7 +1286,7 @@
           <a:bodyPr/>
           <a:lstStyle/>
           <a:p>
-            <a:fld id="{4431D062-010A-4A9F-9E50-F30F5795E17A}" type="slidenum">
+            <a:fld id="{CB7EF21F-3340-450A-AE9B-0B1F8E7183E5}" type="slidenum">
               <a:rPr kumimoji="1" lang="ja-JP" altLang="en-US" smtClean="0"/>
               <a:t>‹#›</a:t>
             </a:fld>
@@ -1297,7 +1297,7 @@
     </p:spTree>
     <p:extLst>
       <p:ext uri="{BB962C8B-B14F-4D97-AF65-F5344CB8AC3E}">
-        <p14:creationId xmlns:p14="http://schemas.microsoft.com/office/powerpoint/2010/main" val="658372180"/>
+        <p14:creationId xmlns:p14="http://schemas.microsoft.com/office/powerpoint/2010/main" val="917355909"/>
       </p:ext>
     </p:extLst>
   </p:cSld>
@@ -1329,7 +1329,7 @@
           <p:cNvPr id="2" name="タイトル 1">
             <a:extLst>
               <a:ext uri="{FF2B5EF4-FFF2-40B4-BE49-F238E27FC236}">
-                <a16:creationId xmlns:a16="http://schemas.microsoft.com/office/drawing/2014/main" id="{7A4221FA-B9F8-FB2A-7273-76B79D9FB838}"/>
+                <a16:creationId xmlns:a16="http://schemas.microsoft.com/office/drawing/2014/main" id="{E417DA35-18C3-4050-0BFC-B8F820840AD2}"/>
               </a:ext>
             </a:extLst>
           </p:cNvPr>
@@ -1357,7 +1357,7 @@
           <p:cNvPr id="3" name="コンテンツ プレースホルダー 2">
             <a:extLst>
               <a:ext uri="{FF2B5EF4-FFF2-40B4-BE49-F238E27FC236}">
-                <a16:creationId xmlns:a16="http://schemas.microsoft.com/office/drawing/2014/main" id="{9C4CC890-5440-0633-33C1-69ABF8FEE557}"/>
+                <a16:creationId xmlns:a16="http://schemas.microsoft.com/office/drawing/2014/main" id="{6EADC444-6F99-1CDE-4EFC-60232B9E84E3}"/>
               </a:ext>
             </a:extLst>
           </p:cNvPr>
@@ -1451,7 +1451,7 @@
           <p:cNvPr id="4" name="コンテンツ プレースホルダー 3">
             <a:extLst>
               <a:ext uri="{FF2B5EF4-FFF2-40B4-BE49-F238E27FC236}">
-                <a16:creationId xmlns:a16="http://schemas.microsoft.com/office/drawing/2014/main" id="{2DF9A25C-2DE0-D20A-E9D6-54F5495DCBE4}"/>
+                <a16:creationId xmlns:a16="http://schemas.microsoft.com/office/drawing/2014/main" id="{75754548-0377-8577-A4E3-CAD7987D4316}"/>
               </a:ext>
             </a:extLst>
           </p:cNvPr>
@@ -1545,7 +1545,7 @@
           <p:cNvPr id="5" name="日付プレースホルダー 4">
             <a:extLst>
               <a:ext uri="{FF2B5EF4-FFF2-40B4-BE49-F238E27FC236}">
-                <a16:creationId xmlns:a16="http://schemas.microsoft.com/office/drawing/2014/main" id="{CC865B42-152B-1CF0-41F3-5DFCAFE3333C}"/>
+                <a16:creationId xmlns:a16="http://schemas.microsoft.com/office/drawing/2014/main" id="{F177AA8E-CE52-9BB7-34AB-4A5C6ACB7AF1}"/>
               </a:ext>
             </a:extLst>
           </p:cNvPr>
@@ -1561,7 +1561,7 @@
           <a:bodyPr/>
           <a:lstStyle/>
           <a:p>
-            <a:fld id="{5E8F4A22-A18C-402B-B7CA-A3D7DAB0F12F}" type="datetimeFigureOut">
+            <a:fld id="{1B49A6B7-8275-4D70-8097-DAA8B1A1BCE2}" type="datetimeFigureOut">
               <a:rPr kumimoji="1" lang="ja-JP" altLang="en-US" smtClean="0"/>
               <a:t>2026/7/30</a:t>
             </a:fld>
@@ -1574,7 +1574,7 @@
           <p:cNvPr id="6" name="フッター プレースホルダー 5">
             <a:extLst>
               <a:ext uri="{FF2B5EF4-FFF2-40B4-BE49-F238E27FC236}">
-                <a16:creationId xmlns:a16="http://schemas.microsoft.com/office/drawing/2014/main" id="{05C30695-7F15-A909-988B-9EFACC1C5856}"/>
+                <a16:creationId xmlns:a16="http://schemas.microsoft.com/office/drawing/2014/main" id="{9D672921-DCC9-14BD-109F-F50E621A135F}"/>
               </a:ext>
             </a:extLst>
           </p:cNvPr>
@@ -1599,7 +1599,7 @@
           <p:cNvPr id="7" name="スライド番号プレースホルダー 6">
             <a:extLst>
               <a:ext uri="{FF2B5EF4-FFF2-40B4-BE49-F238E27FC236}">
-                <a16:creationId xmlns:a16="http://schemas.microsoft.com/office/drawing/2014/main" id="{CA096A3C-9474-CB9C-9740-162AAFA4FB11}"/>
+                <a16:creationId xmlns:a16="http://schemas.microsoft.com/office/drawing/2014/main" id="{8B26E52A-DBE4-A2F9-D9F1-9F7CE902E14D}"/>
               </a:ext>
             </a:extLst>
           </p:cNvPr>
@@ -1615,7 +1615,7 @@
           <a:bodyPr/>
           <a:lstStyle/>
           <a:p>
-            <a:fld id="{4431D062-010A-4A9F-9E50-F30F5795E17A}" type="slidenum">
+            <a:fld id="{CB7EF21F-3340-450A-AE9B-0B1F8E7183E5}" type="slidenum">
               <a:rPr kumimoji="1" lang="ja-JP" altLang="en-US" smtClean="0"/>
               <a:t>‹#›</a:t>
             </a:fld>
@@ -1626,7 +1626,7 @@
     </p:spTree>
     <p:extLst>
       <p:ext uri="{BB962C8B-B14F-4D97-AF65-F5344CB8AC3E}">
-        <p14:creationId xmlns:p14="http://schemas.microsoft.com/office/powerpoint/2010/main" val="1792576176"/>
+        <p14:creationId xmlns:p14="http://schemas.microsoft.com/office/powerpoint/2010/main" val="315826355"/>
       </p:ext>
     </p:extLst>
   </p:cSld>
@@ -1658,7 +1658,7 @@
           <p:cNvPr id="2" name="タイトル 1">
             <a:extLst>
               <a:ext uri="{FF2B5EF4-FFF2-40B4-BE49-F238E27FC236}">
-                <a16:creationId xmlns:a16="http://schemas.microsoft.com/office/drawing/2014/main" id="{2B30D61B-84D1-50FC-799D-11C1C366AC84}"/>
+                <a16:creationId xmlns:a16="http://schemas.microsoft.com/office/drawing/2014/main" id="{BAA8D5E8-7AF3-D07C-151D-B625C7400D13}"/>
               </a:ext>
             </a:extLst>
           </p:cNvPr>
@@ -1691,7 +1691,7 @@
           <p:cNvPr id="3" name="テキスト プレースホルダー 2">
             <a:extLst>
               <a:ext uri="{FF2B5EF4-FFF2-40B4-BE49-F238E27FC236}">
-                <a16:creationId xmlns:a16="http://schemas.microsoft.com/office/drawing/2014/main" id="{809DDA02-A494-9067-9695-008684E9FFF4}"/>
+                <a16:creationId xmlns:a16="http://schemas.microsoft.com/office/drawing/2014/main" id="{2FBB1462-AA84-5BA7-93D4-F174E9F8E346}"/>
               </a:ext>
             </a:extLst>
           </p:cNvPr>
@@ -1762,7 +1762,7 @@
           <p:cNvPr id="4" name="コンテンツ プレースホルダー 3">
             <a:extLst>
               <a:ext uri="{FF2B5EF4-FFF2-40B4-BE49-F238E27FC236}">
-                <a16:creationId xmlns:a16="http://schemas.microsoft.com/office/drawing/2014/main" id="{12BBB53E-041C-AC22-AC33-361C8C1B050E}"/>
+                <a16:creationId xmlns:a16="http://schemas.microsoft.com/office/drawing/2014/main" id="{57AA898C-C1F1-6E9E-3051-F4D61EE48F3A}"/>
               </a:ext>
             </a:extLst>
           </p:cNvPr>
@@ -1856,7 +1856,7 @@
           <p:cNvPr id="5" name="テキスト プレースホルダー 4">
             <a:extLst>
               <a:ext uri="{FF2B5EF4-FFF2-40B4-BE49-F238E27FC236}">
-                <a16:creationId xmlns:a16="http://schemas.microsoft.com/office/drawing/2014/main" id="{6CFD4071-084D-7AD9-435C-4D4FE2DF5A41}"/>
+                <a16:creationId xmlns:a16="http://schemas.microsoft.com/office/drawing/2014/main" id="{715EF932-A362-F6B0-8232-F1872F4788B1}"/>
               </a:ext>
             </a:extLst>
           </p:cNvPr>
@@ -1927,7 +1927,7 @@
           <p:cNvPr id="6" name="コンテンツ プレースホルダー 5">
             <a:extLst>
               <a:ext uri="{FF2B5EF4-FFF2-40B4-BE49-F238E27FC236}">
-                <a16:creationId xmlns:a16="http://schemas.microsoft.com/office/drawing/2014/main" id="{716199A4-4069-D3EE-D6FB-0BF8D11F2D1B}"/>
+                <a16:creationId xmlns:a16="http://schemas.microsoft.com/office/drawing/2014/main" id="{28571525-2F59-F618-F2A5-419B98646D8E}"/>
               </a:ext>
             </a:extLst>
           </p:cNvPr>
@@ -2021,7 +2021,7 @@
           <p:cNvPr id="7" name="日付プレースホルダー 6">
             <a:extLst>
               <a:ext uri="{FF2B5EF4-FFF2-40B4-BE49-F238E27FC236}">
-                <a16:creationId xmlns:a16="http://schemas.microsoft.com/office/drawing/2014/main" id="{92FE662D-BBBD-5F5B-EA50-F55F0399D4A4}"/>
+                <a16:creationId xmlns:a16="http://schemas.microsoft.com/office/drawing/2014/main" id="{1EE140FD-1155-B2FC-69E1-E8222A812DDB}"/>
               </a:ext>
             </a:extLst>
           </p:cNvPr>
@@ -2037,7 +2037,7 @@
           <a:bodyPr/>
           <a:lstStyle/>
           <a:p>
-            <a:fld id="{5E8F4A22-A18C-402B-B7CA-A3D7DAB0F12F}" type="datetimeFigureOut">
+            <a:fld id="{1B49A6B7-8275-4D70-8097-DAA8B1A1BCE2}" type="datetimeFigureOut">
               <a:rPr kumimoji="1" lang="ja-JP" altLang="en-US" smtClean="0"/>
               <a:t>2026/7/30</a:t>
             </a:fld>
@@ -2050,7 +2050,7 @@
           <p:cNvPr id="8" name="フッター プレースホルダー 7">
             <a:extLst>
               <a:ext uri="{FF2B5EF4-FFF2-40B4-BE49-F238E27FC236}">
-                <a16:creationId xmlns:a16="http://schemas.microsoft.com/office/drawing/2014/main" id="{CB1E2001-2ADC-9C54-F2B6-3F7AD97A3187}"/>
+                <a16:creationId xmlns:a16="http://schemas.microsoft.com/office/drawing/2014/main" id="{BE5A4CC9-0F9A-BFBE-CB87-7813EB128F70}"/>
               </a:ext>
             </a:extLst>
           </p:cNvPr>
@@ -2075,7 +2075,7 @@
           <p:cNvPr id="9" name="スライド番号プレースホルダー 8">
             <a:extLst>
               <a:ext uri="{FF2B5EF4-FFF2-40B4-BE49-F238E27FC236}">
-                <a16:creationId xmlns:a16="http://schemas.microsoft.com/office/drawing/2014/main" id="{4D4365F6-0A0B-45D7-7525-D8886D995821}"/>
+                <a16:creationId xmlns:a16="http://schemas.microsoft.com/office/drawing/2014/main" id="{09BD6CA7-DB00-7C47-9E9E-0B28CCBE5B11}"/>
               </a:ext>
             </a:extLst>
           </p:cNvPr>
@@ -2091,7 +2091,7 @@
           <a:bodyPr/>
           <a:lstStyle/>
           <a:p>
-            <a:fld id="{4431D062-010A-4A9F-9E50-F30F5795E17A}" type="slidenum">
+            <a:fld id="{CB7EF21F-3340-450A-AE9B-0B1F8E7183E5}" type="slidenum">
               <a:rPr kumimoji="1" lang="ja-JP" altLang="en-US" smtClean="0"/>
               <a:t>‹#›</a:t>
             </a:fld>
@@ -2102,7 +2102,7 @@
     </p:spTree>
     <p:extLst>
       <p:ext uri="{BB962C8B-B14F-4D97-AF65-F5344CB8AC3E}">
-        <p14:creationId xmlns:p14="http://schemas.microsoft.com/office/powerpoint/2010/main" val="41139222"/>
+        <p14:creationId xmlns:p14="http://schemas.microsoft.com/office/powerpoint/2010/main" val="173795160"/>
       </p:ext>
     </p:extLst>
   </p:cSld>
@@ -2134,7 +2134,7 @@
           <p:cNvPr id="2" name="タイトル 1">
             <a:extLst>
               <a:ext uri="{FF2B5EF4-FFF2-40B4-BE49-F238E27FC236}">
-                <a16:creationId xmlns:a16="http://schemas.microsoft.com/office/drawing/2014/main" id="{BD8B8811-956C-C545-BE6D-0BDFCF90D042}"/>
+                <a16:creationId xmlns:a16="http://schemas.microsoft.com/office/drawing/2014/main" id="{66C51F3A-13D5-CE9A-C23E-2A201189027E}"/>
               </a:ext>
             </a:extLst>
           </p:cNvPr>
@@ -2162,7 +2162,7 @@
           <p:cNvPr id="3" name="日付プレースホルダー 2">
             <a:extLst>
               <a:ext uri="{FF2B5EF4-FFF2-40B4-BE49-F238E27FC236}">
-                <a16:creationId xmlns:a16="http://schemas.microsoft.com/office/drawing/2014/main" id="{CDAC3C68-1F2F-705F-8CFF-77D398C99DF0}"/>
+                <a16:creationId xmlns:a16="http://schemas.microsoft.com/office/drawing/2014/main" id="{C4CA80BF-9330-58F7-5C58-3DF5B33E85DE}"/>
               </a:ext>
             </a:extLst>
           </p:cNvPr>
@@ -2178,7 +2178,7 @@
           <a:bodyPr/>
           <a:lstStyle/>
           <a:p>
-            <a:fld id="{5E8F4A22-A18C-402B-B7CA-A3D7DAB0F12F}" type="datetimeFigureOut">
+            <a:fld id="{1B49A6B7-8275-4D70-8097-DAA8B1A1BCE2}" type="datetimeFigureOut">
               <a:rPr kumimoji="1" lang="ja-JP" altLang="en-US" smtClean="0"/>
               <a:t>2026/7/30</a:t>
             </a:fld>
@@ -2191,7 +2191,7 @@
           <p:cNvPr id="4" name="フッター プレースホルダー 3">
             <a:extLst>
               <a:ext uri="{FF2B5EF4-FFF2-40B4-BE49-F238E27FC236}">
-                <a16:creationId xmlns:a16="http://schemas.microsoft.com/office/drawing/2014/main" id="{499F38EF-8BAC-8337-0594-8D8C282A3BE0}"/>
+                <a16:creationId xmlns:a16="http://schemas.microsoft.com/office/drawing/2014/main" id="{4577137B-1F83-5915-8C2B-AAFE0FE847DC}"/>
               </a:ext>
             </a:extLst>
           </p:cNvPr>
@@ -2216,7 +2216,7 @@
           <p:cNvPr id="5" name="スライド番号プレースホルダー 4">
             <a:extLst>
               <a:ext uri="{FF2B5EF4-FFF2-40B4-BE49-F238E27FC236}">
-                <a16:creationId xmlns:a16="http://schemas.microsoft.com/office/drawing/2014/main" id="{1BB7861E-E059-F71C-87D2-D18FAE995A04}"/>
+                <a16:creationId xmlns:a16="http://schemas.microsoft.com/office/drawing/2014/main" id="{BCBCDF1F-90A7-DEF3-CF8D-97B3FB28BE30}"/>
               </a:ext>
             </a:extLst>
           </p:cNvPr>
@@ -2232,7 +2232,7 @@
           <a:bodyPr/>
           <a:lstStyle/>
           <a:p>
-            <a:fld id="{4431D062-010A-4A9F-9E50-F30F5795E17A}" type="slidenum">
+            <a:fld id="{CB7EF21F-3340-450A-AE9B-0B1F8E7183E5}" type="slidenum">
               <a:rPr kumimoji="1" lang="ja-JP" altLang="en-US" smtClean="0"/>
               <a:t>‹#›</a:t>
             </a:fld>
@@ -2243,7 +2243,7 @@
     </p:spTree>
     <p:extLst>
       <p:ext uri="{BB962C8B-B14F-4D97-AF65-F5344CB8AC3E}">
-        <p14:creationId xmlns:p14="http://schemas.microsoft.com/office/powerpoint/2010/main" val="2062915895"/>
+        <p14:creationId xmlns:p14="http://schemas.microsoft.com/office/powerpoint/2010/main" val="1708723078"/>
       </p:ext>
     </p:extLst>
   </p:cSld>
@@ -2275,7 +2275,7 @@
           <p:cNvPr id="2" name="日付プレースホルダー 1">
             <a:extLst>
               <a:ext uri="{FF2B5EF4-FFF2-40B4-BE49-F238E27FC236}">
-                <a16:creationId xmlns:a16="http://schemas.microsoft.com/office/drawing/2014/main" id="{D816125E-E3EA-182D-E62E-E7D036C48B00}"/>
+                <a16:creationId xmlns:a16="http://schemas.microsoft.com/office/drawing/2014/main" id="{5E440A0B-8A63-1592-FAE0-812860F2C9F5}"/>
               </a:ext>
             </a:extLst>
           </p:cNvPr>
@@ -2291,7 +2291,7 @@
           <a:bodyPr/>
           <a:lstStyle/>
           <a:p>
-            <a:fld id="{5E8F4A22-A18C-402B-B7CA-A3D7DAB0F12F}" type="datetimeFigureOut">
+            <a:fld id="{1B49A6B7-8275-4D70-8097-DAA8B1A1BCE2}" type="datetimeFigureOut">
               <a:rPr kumimoji="1" lang="ja-JP" altLang="en-US" smtClean="0"/>
               <a:t>2026/7/30</a:t>
             </a:fld>
@@ -2304,7 +2304,7 @@
           <p:cNvPr id="3" name="フッター プレースホルダー 2">
             <a:extLst>
               <a:ext uri="{FF2B5EF4-FFF2-40B4-BE49-F238E27FC236}">
-                <a16:creationId xmlns:a16="http://schemas.microsoft.com/office/drawing/2014/main" id="{03DB29F6-2FEF-70C0-AD5C-E413CEDA71E9}"/>
+                <a16:creationId xmlns:a16="http://schemas.microsoft.com/office/drawing/2014/main" id="{FE87B5FA-0BEA-7A7E-C88D-A6A0ADDC0F84}"/>
               </a:ext>
             </a:extLst>
           </p:cNvPr>
@@ -2329,7 +2329,7 @@
           <p:cNvPr id="4" name="スライド番号プレースホルダー 3">
             <a:extLst>
               <a:ext uri="{FF2B5EF4-FFF2-40B4-BE49-F238E27FC236}">
-                <a16:creationId xmlns:a16="http://schemas.microsoft.com/office/drawing/2014/main" id="{3BDC7805-C6E4-7E92-6F40-4A0943521EBA}"/>
+                <a16:creationId xmlns:a16="http://schemas.microsoft.com/office/drawing/2014/main" id="{FEAF9C3C-CECC-CE61-E3BE-A047BE97214B}"/>
               </a:ext>
             </a:extLst>
           </p:cNvPr>
@@ -2345,7 +2345,7 @@
           <a:bodyPr/>
           <a:lstStyle/>
           <a:p>
-            <a:fld id="{4431D062-010A-4A9F-9E50-F30F5795E17A}" type="slidenum">
+            <a:fld id="{CB7EF21F-3340-450A-AE9B-0B1F8E7183E5}" type="slidenum">
               <a:rPr kumimoji="1" lang="ja-JP" altLang="en-US" smtClean="0"/>
               <a:t>‹#›</a:t>
             </a:fld>
@@ -2356,7 +2356,7 @@
     </p:spTree>
     <p:extLst>
       <p:ext uri="{BB962C8B-B14F-4D97-AF65-F5344CB8AC3E}">
-        <p14:creationId xmlns:p14="http://schemas.microsoft.com/office/powerpoint/2010/main" val="3751314429"/>
+        <p14:creationId xmlns:p14="http://schemas.microsoft.com/office/powerpoint/2010/main" val="1143250133"/>
       </p:ext>
     </p:extLst>
   </p:cSld>
@@ -2388,7 +2388,7 @@
           <p:cNvPr id="2" name="タイトル 1">
             <a:extLst>
               <a:ext uri="{FF2B5EF4-FFF2-40B4-BE49-F238E27FC236}">
-                <a16:creationId xmlns:a16="http://schemas.microsoft.com/office/drawing/2014/main" id="{5EB01B99-22EB-7E94-6EBF-C14B8DEC0635}"/>
+                <a16:creationId xmlns:a16="http://schemas.microsoft.com/office/drawing/2014/main" id="{B6276D6B-F82E-65AC-0074-B41483A963E4}"/>
               </a:ext>
             </a:extLst>
           </p:cNvPr>
@@ -2425,7 +2425,7 @@
           <p:cNvPr id="3" name="コンテンツ プレースホルダー 2">
             <a:extLst>
               <a:ext uri="{FF2B5EF4-FFF2-40B4-BE49-F238E27FC236}">
-                <a16:creationId xmlns:a16="http://schemas.microsoft.com/office/drawing/2014/main" id="{A9EC55F7-32FA-10C3-3F56-5511BA7744E7}"/>
+                <a16:creationId xmlns:a16="http://schemas.microsoft.com/office/drawing/2014/main" id="{61E19175-5531-CE0B-AE54-77BA9D8ECF4E}"/>
               </a:ext>
             </a:extLst>
           </p:cNvPr>
@@ -2547,7 +2547,7 @@
           <p:cNvPr id="4" name="テキスト プレースホルダー 3">
             <a:extLst>
               <a:ext uri="{FF2B5EF4-FFF2-40B4-BE49-F238E27FC236}">
-                <a16:creationId xmlns:a16="http://schemas.microsoft.com/office/drawing/2014/main" id="{A312C629-66F2-1045-2ECC-03DA30304BA8}"/>
+                <a16:creationId xmlns:a16="http://schemas.microsoft.com/office/drawing/2014/main" id="{928C0CB4-E4B7-3547-74DB-77C0744600C5}"/>
               </a:ext>
             </a:extLst>
           </p:cNvPr>
@@ -2618,7 +2618,7 @@
           <p:cNvPr id="5" name="日付プレースホルダー 4">
             <a:extLst>
               <a:ext uri="{FF2B5EF4-FFF2-40B4-BE49-F238E27FC236}">
-                <a16:creationId xmlns:a16="http://schemas.microsoft.com/office/drawing/2014/main" id="{95ECEABD-E628-A926-034C-B5DA0CF835D1}"/>
+                <a16:creationId xmlns:a16="http://schemas.microsoft.com/office/drawing/2014/main" id="{60BCD17D-6DDC-9992-1949-70E23E7B69E7}"/>
               </a:ext>
             </a:extLst>
           </p:cNvPr>
@@ -2634,7 +2634,7 @@
           <a:bodyPr/>
           <a:lstStyle/>
           <a:p>
-            <a:fld id="{5E8F4A22-A18C-402B-B7CA-A3D7DAB0F12F}" type="datetimeFigureOut">
+            <a:fld id="{1B49A6B7-8275-4D70-8097-DAA8B1A1BCE2}" type="datetimeFigureOut">
               <a:rPr kumimoji="1" lang="ja-JP" altLang="en-US" smtClean="0"/>
               <a:t>2026/7/30</a:t>
             </a:fld>
@@ -2647,7 +2647,7 @@
           <p:cNvPr id="6" name="フッター プレースホルダー 5">
             <a:extLst>
               <a:ext uri="{FF2B5EF4-FFF2-40B4-BE49-F238E27FC236}">
-                <a16:creationId xmlns:a16="http://schemas.microsoft.com/office/drawing/2014/main" id="{396A5E9A-A4EC-00DA-DB01-2A66268CAECE}"/>
+                <a16:creationId xmlns:a16="http://schemas.microsoft.com/office/drawing/2014/main" id="{0781C482-BE6A-6074-E1C8-B87A59D10331}"/>
               </a:ext>
             </a:extLst>
           </p:cNvPr>
@@ -2672,7 +2672,7 @@
           <p:cNvPr id="7" name="スライド番号プレースホルダー 6">
             <a:extLst>
               <a:ext uri="{FF2B5EF4-FFF2-40B4-BE49-F238E27FC236}">
-                <a16:creationId xmlns:a16="http://schemas.microsoft.com/office/drawing/2014/main" id="{7EF4B2D2-FE14-6B44-937F-FF519A09847A}"/>
+                <a16:creationId xmlns:a16="http://schemas.microsoft.com/office/drawing/2014/main" id="{9AD5C811-A1E4-AD00-DE8B-999883683F72}"/>
               </a:ext>
             </a:extLst>
           </p:cNvPr>
@@ -2688,7 +2688,7 @@
           <a:bodyPr/>
           <a:lstStyle/>
           <a:p>
-            <a:fld id="{4431D062-010A-4A9F-9E50-F30F5795E17A}" type="slidenum">
+            <a:fld id="{CB7EF21F-3340-450A-AE9B-0B1F8E7183E5}" type="slidenum">
               <a:rPr kumimoji="1" lang="ja-JP" altLang="en-US" smtClean="0"/>
               <a:t>‹#›</a:t>
             </a:fld>
@@ -2699,7 +2699,7 @@
     </p:spTree>
     <p:extLst>
       <p:ext uri="{BB962C8B-B14F-4D97-AF65-F5344CB8AC3E}">
-        <p14:creationId xmlns:p14="http://schemas.microsoft.com/office/powerpoint/2010/main" val="1340795241"/>
+        <p14:creationId xmlns:p14="http://schemas.microsoft.com/office/powerpoint/2010/main" val="580468008"/>
       </p:ext>
     </p:extLst>
   </p:cSld>
@@ -2731,7 +2731,7 @@
           <p:cNvPr id="2" name="タイトル 1">
             <a:extLst>
               <a:ext uri="{FF2B5EF4-FFF2-40B4-BE49-F238E27FC236}">
-                <a16:creationId xmlns:a16="http://schemas.microsoft.com/office/drawing/2014/main" id="{4C095456-0C1C-E578-FEAC-9DD1CB237611}"/>
+                <a16:creationId xmlns:a16="http://schemas.microsoft.com/office/drawing/2014/main" id="{94D02280-056C-D333-0B27-13E8A616D573}"/>
               </a:ext>
             </a:extLst>
           </p:cNvPr>
@@ -2768,7 +2768,7 @@
           <p:cNvPr id="3" name="図プレースホルダー 2">
             <a:extLst>
               <a:ext uri="{FF2B5EF4-FFF2-40B4-BE49-F238E27FC236}">
-                <a16:creationId xmlns:a16="http://schemas.microsoft.com/office/drawing/2014/main" id="{33993662-5543-9487-94DE-A4656B47D64D}"/>
+                <a16:creationId xmlns:a16="http://schemas.microsoft.com/office/drawing/2014/main" id="{AEB4509F-B721-39DA-7B4B-B8C90B7E7261}"/>
               </a:ext>
             </a:extLst>
           </p:cNvPr>
@@ -2835,7 +2835,7 @@
           <p:cNvPr id="4" name="テキスト プレースホルダー 3">
             <a:extLst>
               <a:ext uri="{FF2B5EF4-FFF2-40B4-BE49-F238E27FC236}">
-                <a16:creationId xmlns:a16="http://schemas.microsoft.com/office/drawing/2014/main" id="{93E181CA-695C-3E98-F3B2-4D6DAE4D1048}"/>
+                <a16:creationId xmlns:a16="http://schemas.microsoft.com/office/drawing/2014/main" id="{32DAE39C-9FE3-ED00-0A86-4CA3FBE971E7}"/>
               </a:ext>
             </a:extLst>
           </p:cNvPr>
@@ -2906,7 +2906,7 @@
           <p:cNvPr id="5" name="日付プレースホルダー 4">
             <a:extLst>
               <a:ext uri="{FF2B5EF4-FFF2-40B4-BE49-F238E27FC236}">
-                <a16:creationId xmlns:a16="http://schemas.microsoft.com/office/drawing/2014/main" id="{4217A162-EAB3-79AA-CC86-F492E36CE330}"/>
+                <a16:creationId xmlns:a16="http://schemas.microsoft.com/office/drawing/2014/main" id="{90C20347-85B8-E8AB-E010-74E56CE900E3}"/>
               </a:ext>
             </a:extLst>
           </p:cNvPr>
@@ -2922,7 +2922,7 @@
           <a:bodyPr/>
           <a:lstStyle/>
           <a:p>
-            <a:fld id="{5E8F4A22-A18C-402B-B7CA-A3D7DAB0F12F}" type="datetimeFigureOut">
+            <a:fld id="{1B49A6B7-8275-4D70-8097-DAA8B1A1BCE2}" type="datetimeFigureOut">
               <a:rPr kumimoji="1" lang="ja-JP" altLang="en-US" smtClean="0"/>
               <a:t>2026/7/30</a:t>
             </a:fld>
@@ -2935,7 +2935,7 @@
           <p:cNvPr id="6" name="フッター プレースホルダー 5">
             <a:extLst>
               <a:ext uri="{FF2B5EF4-FFF2-40B4-BE49-F238E27FC236}">
-                <a16:creationId xmlns:a16="http://schemas.microsoft.com/office/drawing/2014/main" id="{E75467E6-BA26-131A-FAB5-D3619BB97BDB}"/>
+                <a16:creationId xmlns:a16="http://schemas.microsoft.com/office/drawing/2014/main" id="{2B4CFFE0-2CB8-26AF-EF1E-DDE340C76322}"/>
               </a:ext>
             </a:extLst>
           </p:cNvPr>
@@ -2960,7 +2960,7 @@
           <p:cNvPr id="7" name="スライド番号プレースホルダー 6">
             <a:extLst>
               <a:ext uri="{FF2B5EF4-FFF2-40B4-BE49-F238E27FC236}">
-                <a16:creationId xmlns:a16="http://schemas.microsoft.com/office/drawing/2014/main" id="{F7EC28BB-CA27-3D02-8700-4A727727A2D7}"/>
+                <a16:creationId xmlns:a16="http://schemas.microsoft.com/office/drawing/2014/main" id="{6D01AE7D-1E90-44E8-5AAF-BF2B0B81EDCA}"/>
               </a:ext>
             </a:extLst>
           </p:cNvPr>
@@ -2976,7 +2976,7 @@
           <a:bodyPr/>
           <a:lstStyle/>
           <a:p>
-            <a:fld id="{4431D062-010A-4A9F-9E50-F30F5795E17A}" type="slidenum">
+            <a:fld id="{CB7EF21F-3340-450A-AE9B-0B1F8E7183E5}" type="slidenum">
               <a:rPr kumimoji="1" lang="ja-JP" altLang="en-US" smtClean="0"/>
               <a:t>‹#›</a:t>
             </a:fld>
@@ -2987,7 +2987,7 @@
     </p:spTree>
     <p:extLst>
       <p:ext uri="{BB962C8B-B14F-4D97-AF65-F5344CB8AC3E}">
-        <p14:creationId xmlns:p14="http://schemas.microsoft.com/office/powerpoint/2010/main" val="3109829645"/>
+        <p14:creationId xmlns:p14="http://schemas.microsoft.com/office/powerpoint/2010/main" val="388705353"/>
       </p:ext>
     </p:extLst>
   </p:cSld>
@@ -3024,7 +3024,7 @@
           <p:cNvPr id="2" name="タイトル プレースホルダー 1">
             <a:extLst>
               <a:ext uri="{FF2B5EF4-FFF2-40B4-BE49-F238E27FC236}">
-                <a16:creationId xmlns:a16="http://schemas.microsoft.com/office/drawing/2014/main" id="{53942404-5BE4-5C49-8A2F-B1D128BEB649}"/>
+                <a16:creationId xmlns:a16="http://schemas.microsoft.com/office/drawing/2014/main" id="{1F2FA420-92DD-53BE-260E-B77F7B93079D}"/>
               </a:ext>
             </a:extLst>
           </p:cNvPr>
@@ -3062,7 +3062,7 @@
           <p:cNvPr id="3" name="テキスト プレースホルダー 2">
             <a:extLst>
               <a:ext uri="{FF2B5EF4-FFF2-40B4-BE49-F238E27FC236}">
-                <a16:creationId xmlns:a16="http://schemas.microsoft.com/office/drawing/2014/main" id="{B4BAD786-67DC-9F98-AECD-E69BCF4F8083}"/>
+                <a16:creationId xmlns:a16="http://schemas.microsoft.com/office/drawing/2014/main" id="{726BEC19-F9C3-57C0-698C-49D88F44C785}"/>
               </a:ext>
             </a:extLst>
           </p:cNvPr>
@@ -3161,7 +3161,7 @@
           <p:cNvPr id="4" name="日付プレースホルダー 3">
             <a:extLst>
               <a:ext uri="{FF2B5EF4-FFF2-40B4-BE49-F238E27FC236}">
-                <a16:creationId xmlns:a16="http://schemas.microsoft.com/office/drawing/2014/main" id="{9F1A3EBB-D6EC-9EF4-384E-4596DAC5D688}"/>
+                <a16:creationId xmlns:a16="http://schemas.microsoft.com/office/drawing/2014/main" id="{6CEC2E4C-37F8-49E3-7DFE-07116D245416}"/>
               </a:ext>
             </a:extLst>
           </p:cNvPr>
@@ -3195,7 +3195,7 @@
             </a:lvl1pPr>
           </a:lstStyle>
           <a:p>
-            <a:fld id="{5E8F4A22-A18C-402B-B7CA-A3D7DAB0F12F}" type="datetimeFigureOut">
+            <a:fld id="{1B49A6B7-8275-4D70-8097-DAA8B1A1BCE2}" type="datetimeFigureOut">
               <a:rPr kumimoji="1" lang="ja-JP" altLang="en-US" smtClean="0"/>
               <a:t>2026/7/30</a:t>
             </a:fld>
@@ -3208,7 +3208,7 @@
           <p:cNvPr id="5" name="フッター プレースホルダー 4">
             <a:extLst>
               <a:ext uri="{FF2B5EF4-FFF2-40B4-BE49-F238E27FC236}">
-                <a16:creationId xmlns:a16="http://schemas.microsoft.com/office/drawing/2014/main" id="{6F91C932-4B3F-092D-FB59-A3FBD9FC6E33}"/>
+                <a16:creationId xmlns:a16="http://schemas.microsoft.com/office/drawing/2014/main" id="{A01015E9-DE25-3CB1-EEB7-B1AFC7358C6C}"/>
               </a:ext>
             </a:extLst>
           </p:cNvPr>
@@ -3251,7 +3251,7 @@
           <p:cNvPr id="6" name="スライド番号プレースホルダー 5">
             <a:extLst>
               <a:ext uri="{FF2B5EF4-FFF2-40B4-BE49-F238E27FC236}">
-                <a16:creationId xmlns:a16="http://schemas.microsoft.com/office/drawing/2014/main" id="{1B27F4CB-68E0-8E02-3920-199B9AC4D7E9}"/>
+                <a16:creationId xmlns:a16="http://schemas.microsoft.com/office/drawing/2014/main" id="{A68D6062-9F75-747C-4241-527E8F14CF3A}"/>
               </a:ext>
             </a:extLst>
           </p:cNvPr>
@@ -3285,7 +3285,7 @@
             </a:lvl1pPr>
           </a:lstStyle>
           <a:p>
-            <a:fld id="{4431D062-010A-4A9F-9E50-F30F5795E17A}" type="slidenum">
+            <a:fld id="{CB7EF21F-3340-450A-AE9B-0B1F8E7183E5}" type="slidenum">
               <a:rPr kumimoji="1" lang="ja-JP" altLang="en-US" smtClean="0"/>
               <a:t>‹#›</a:t>
             </a:fld>
@@ -3296,7 +3296,7 @@
     </p:spTree>
     <p:extLst>
       <p:ext uri="{BB962C8B-B14F-4D97-AF65-F5344CB8AC3E}">
-        <p14:creationId xmlns:p14="http://schemas.microsoft.com/office/powerpoint/2010/main" val="2184285589"/>
+        <p14:creationId xmlns:p14="http://schemas.microsoft.com/office/powerpoint/2010/main" val="3502372377"/>
       </p:ext>
     </p:extLst>
   </p:cSld>
@@ -3619,7 +3619,7 @@
           <p:cNvPr id="2" name="テキスト ボックス 1">
             <a:extLst>
               <a:ext uri="{FF2B5EF4-FFF2-40B4-BE49-F238E27FC236}">
-                <a16:creationId xmlns:a16="http://schemas.microsoft.com/office/drawing/2014/main" id="{484880EE-0FD9-8410-01F1-2BFE21DB2C8C}"/>
+                <a16:creationId xmlns:a16="http://schemas.microsoft.com/office/drawing/2014/main" id="{B43DFB90-BEED-B7A6-5EF0-7AF34B35D202}"/>
               </a:ext>
             </a:extLst>
           </p:cNvPr>
@@ -3665,7 +3665,7 @@
           <p:cNvPr id="3" name="テキスト ボックス 2">
             <a:extLst>
               <a:ext uri="{FF2B5EF4-FFF2-40B4-BE49-F238E27FC236}">
-                <a16:creationId xmlns:a16="http://schemas.microsoft.com/office/drawing/2014/main" id="{FA6D7F1C-8F7B-7375-282C-EADAA5DCA969}"/>
+                <a16:creationId xmlns:a16="http://schemas.microsoft.com/office/drawing/2014/main" id="{BEB68B99-F1D1-360C-ACD7-D49A1A8AEEE0}"/>
               </a:ext>
             </a:extLst>
           </p:cNvPr>
@@ -3714,7 +3714,7 @@
           <p:cNvPr id="4" name="テキスト ボックス 3">
             <a:extLst>
               <a:ext uri="{FF2B5EF4-FFF2-40B4-BE49-F238E27FC236}">
-                <a16:creationId xmlns:a16="http://schemas.microsoft.com/office/drawing/2014/main" id="{B8B509C2-84B2-2952-7E25-001DB0D9DD47}"/>
+                <a16:creationId xmlns:a16="http://schemas.microsoft.com/office/drawing/2014/main" id="{D801C1F3-7D70-36A5-F55B-A792825B626C}"/>
               </a:ext>
             </a:extLst>
           </p:cNvPr>
@@ -3754,7 +3754,7 @@
           <p:cNvPr id="5" name="テキスト ボックス 4">
             <a:extLst>
               <a:ext uri="{FF2B5EF4-FFF2-40B4-BE49-F238E27FC236}">
-                <a16:creationId xmlns:a16="http://schemas.microsoft.com/office/drawing/2014/main" id="{22D47B45-E41F-DFE4-4B06-F7588DD5ACD9}"/>
+                <a16:creationId xmlns:a16="http://schemas.microsoft.com/office/drawing/2014/main" id="{502339D5-EB03-1165-7DDD-BA29366779FC}"/>
               </a:ext>
             </a:extLst>
           </p:cNvPr>
@@ -3801,7 +3801,7 @@
             <a:hlinkClick r:id="" action="ppaction://media"/>
             <a:extLst>
               <a:ext uri="{FF2B5EF4-FFF2-40B4-BE49-F238E27FC236}">
-                <a16:creationId xmlns:a16="http://schemas.microsoft.com/office/drawing/2014/main" id="{C839E884-42E9-A23B-8661-3A58FD49A768}"/>
+                <a16:creationId xmlns:a16="http://schemas.microsoft.com/office/drawing/2014/main" id="{105FEAE5-5581-439B-C648-61D08C11ADF7}"/>
               </a:ext>
             </a:extLst>
           </p:cNvPr>
@@ -3836,7 +3836,7 @@
     </p:spTree>
     <p:extLst>
       <p:ext uri="{BB962C8B-B14F-4D97-AF65-F5344CB8AC3E}">
-        <p14:creationId xmlns:p14="http://schemas.microsoft.com/office/powerpoint/2010/main" val="2122895696"/>
+        <p14:creationId xmlns:p14="http://schemas.microsoft.com/office/powerpoint/2010/main" val="1999203415"/>
       </p:ext>
     </p:extLst>
   </p:cSld>
@@ -3960,7 +3960,7 @@
           <p:cNvPr id="2" name="テキスト ボックス 1">
             <a:extLst>
               <a:ext uri="{FF2B5EF4-FFF2-40B4-BE49-F238E27FC236}">
-                <a16:creationId xmlns:a16="http://schemas.microsoft.com/office/drawing/2014/main" id="{F4786580-D24E-711C-E7DA-11F0E46454E0}"/>
+                <a16:creationId xmlns:a16="http://schemas.microsoft.com/office/drawing/2014/main" id="{53B95699-F53D-2729-E7FC-36F825BC447E}"/>
               </a:ext>
             </a:extLst>
           </p:cNvPr>
@@ -4006,7 +4006,7 @@
           <p:cNvPr id="3" name="テキスト ボックス 2">
             <a:extLst>
               <a:ext uri="{FF2B5EF4-FFF2-40B4-BE49-F238E27FC236}">
-                <a16:creationId xmlns:a16="http://schemas.microsoft.com/office/drawing/2014/main" id="{A22198FC-062A-FD81-526D-E05A188FA542}"/>
+                <a16:creationId xmlns:a16="http://schemas.microsoft.com/office/drawing/2014/main" id="{BD17456E-2A3B-95BE-280C-A4859C827FC5}"/>
               </a:ext>
             </a:extLst>
           </p:cNvPr>
@@ -4046,7 +4046,7 @@
           <p:cNvPr id="4" name="テキスト ボックス 3">
             <a:extLst>
               <a:ext uri="{FF2B5EF4-FFF2-40B4-BE49-F238E27FC236}">
-                <a16:creationId xmlns:a16="http://schemas.microsoft.com/office/drawing/2014/main" id="{79705CCC-331E-C2A5-C67F-CB9E3E24ABD7}"/>
+                <a16:creationId xmlns:a16="http://schemas.microsoft.com/office/drawing/2014/main" id="{1A214755-7478-9D1F-0853-CF82A6B332FA}"/>
               </a:ext>
             </a:extLst>
           </p:cNvPr>
@@ -4095,7 +4095,7 @@
           <p:cNvPr id="5" name="テキスト ボックス 4">
             <a:extLst>
               <a:ext uri="{FF2B5EF4-FFF2-40B4-BE49-F238E27FC236}">
-                <a16:creationId xmlns:a16="http://schemas.microsoft.com/office/drawing/2014/main" id="{85F98D39-4C3E-3D91-1B14-3F5EC8A5F0D3}"/>
+                <a16:creationId xmlns:a16="http://schemas.microsoft.com/office/drawing/2014/main" id="{506CED2C-A80C-939A-218E-FA5BC764C472}"/>
               </a:ext>
             </a:extLst>
           </p:cNvPr>
@@ -4142,7 +4142,7 @@
             <a:hlinkClick r:id="" action="ppaction://media"/>
             <a:extLst>
               <a:ext uri="{FF2B5EF4-FFF2-40B4-BE49-F238E27FC236}">
-                <a16:creationId xmlns:a16="http://schemas.microsoft.com/office/drawing/2014/main" id="{8BF97569-99C0-5F23-FA34-2B5680A40D3C}"/>
+                <a16:creationId xmlns:a16="http://schemas.microsoft.com/office/drawing/2014/main" id="{4AB337CA-3B97-3709-9E22-A18D03D52063}"/>
               </a:ext>
             </a:extLst>
           </p:cNvPr>
@@ -4177,7 +4177,7 @@
     </p:spTree>
     <p:extLst>
       <p:ext uri="{BB962C8B-B14F-4D97-AF65-F5344CB8AC3E}">
-        <p14:creationId xmlns:p14="http://schemas.microsoft.com/office/powerpoint/2010/main" val="2004299105"/>
+        <p14:creationId xmlns:p14="http://schemas.microsoft.com/office/powerpoint/2010/main" val="1327751076"/>
       </p:ext>
     </p:extLst>
   </p:cSld>
@@ -4301,7 +4301,7 @@
           <p:cNvPr id="2" name="テキスト ボックス 1">
             <a:extLst>
               <a:ext uri="{FF2B5EF4-FFF2-40B4-BE49-F238E27FC236}">
-                <a16:creationId xmlns:a16="http://schemas.microsoft.com/office/drawing/2014/main" id="{744EE270-3A2E-5B11-0455-6832203BAA0C}"/>
+                <a16:creationId xmlns:a16="http://schemas.microsoft.com/office/drawing/2014/main" id="{7C58B2DE-EE20-03BC-E264-C50937D21E2C}"/>
               </a:ext>
             </a:extLst>
           </p:cNvPr>
@@ -4347,7 +4347,7 @@
           <p:cNvPr id="3" name="テキスト ボックス 2">
             <a:extLst>
               <a:ext uri="{FF2B5EF4-FFF2-40B4-BE49-F238E27FC236}">
-                <a16:creationId xmlns:a16="http://schemas.microsoft.com/office/drawing/2014/main" id="{0F536979-0246-3CD1-CC1A-780EF39AB61B}"/>
+                <a16:creationId xmlns:a16="http://schemas.microsoft.com/office/drawing/2014/main" id="{85A36CCF-3D4A-18BD-3378-73681B77E70C}"/>
               </a:ext>
             </a:extLst>
           </p:cNvPr>
@@ -4387,7 +4387,7 @@
           <p:cNvPr id="4" name="テキスト ボックス 3">
             <a:extLst>
               <a:ext uri="{FF2B5EF4-FFF2-40B4-BE49-F238E27FC236}">
-                <a16:creationId xmlns:a16="http://schemas.microsoft.com/office/drawing/2014/main" id="{CD0D261E-3F37-8FC4-8BF0-846C6307D270}"/>
+                <a16:creationId xmlns:a16="http://schemas.microsoft.com/office/drawing/2014/main" id="{133638EB-ABF4-92B4-E380-46D407664585}"/>
               </a:ext>
             </a:extLst>
           </p:cNvPr>
@@ -4428,7 +4428,7 @@
           <p:cNvPr id="5" name="テキスト ボックス 4">
             <a:extLst>
               <a:ext uri="{FF2B5EF4-FFF2-40B4-BE49-F238E27FC236}">
-                <a16:creationId xmlns:a16="http://schemas.microsoft.com/office/drawing/2014/main" id="{DCAA65E3-85B9-035B-E7CA-F4331271D7AF}"/>
+                <a16:creationId xmlns:a16="http://schemas.microsoft.com/office/drawing/2014/main" id="{52CA09EF-C05B-01AF-58BB-516E0D24961F}"/>
               </a:ext>
             </a:extLst>
           </p:cNvPr>
@@ -4475,7 +4475,7 @@
             <a:hlinkClick r:id="" action="ppaction://media"/>
             <a:extLst>
               <a:ext uri="{FF2B5EF4-FFF2-40B4-BE49-F238E27FC236}">
-                <a16:creationId xmlns:a16="http://schemas.microsoft.com/office/drawing/2014/main" id="{9A2ADEF6-F3CB-9295-D37A-15585627D26C}"/>
+                <a16:creationId xmlns:a16="http://schemas.microsoft.com/office/drawing/2014/main" id="{F680F7A1-FE71-3C7A-0138-EE1C1F6420F2}"/>
               </a:ext>
             </a:extLst>
           </p:cNvPr>
@@ -4510,7 +4510,7 @@
     </p:spTree>
     <p:extLst>
       <p:ext uri="{BB962C8B-B14F-4D97-AF65-F5344CB8AC3E}">
-        <p14:creationId xmlns:p14="http://schemas.microsoft.com/office/powerpoint/2010/main" val="574740572"/>
+        <p14:creationId xmlns:p14="http://schemas.microsoft.com/office/powerpoint/2010/main" val="1837698770"/>
       </p:ext>
     </p:extLst>
   </p:cSld>
@@ -4634,7 +4634,7 @@
           <p:cNvPr id="2" name="テキスト ボックス 1">
             <a:extLst>
               <a:ext uri="{FF2B5EF4-FFF2-40B4-BE49-F238E27FC236}">
-                <a16:creationId xmlns:a16="http://schemas.microsoft.com/office/drawing/2014/main" id="{FD0D450B-EED1-587D-FC04-FE8ECBC7CB34}"/>
+                <a16:creationId xmlns:a16="http://schemas.microsoft.com/office/drawing/2014/main" id="{7800E54D-29F0-4C1B-D988-4426D27F6702}"/>
               </a:ext>
             </a:extLst>
           </p:cNvPr>
@@ -4680,7 +4680,7 @@
           <p:cNvPr id="3" name="テキスト ボックス 2">
             <a:extLst>
               <a:ext uri="{FF2B5EF4-FFF2-40B4-BE49-F238E27FC236}">
-                <a16:creationId xmlns:a16="http://schemas.microsoft.com/office/drawing/2014/main" id="{882638B5-9047-2074-EF19-D544FED0149B}"/>
+                <a16:creationId xmlns:a16="http://schemas.microsoft.com/office/drawing/2014/main" id="{15B9C881-F699-745A-B649-12EDBA4B2B9E}"/>
               </a:ext>
             </a:extLst>
           </p:cNvPr>
@@ -4720,7 +4720,7 @@
           <p:cNvPr id="4" name="テキスト ボックス 3">
             <a:extLst>
               <a:ext uri="{FF2B5EF4-FFF2-40B4-BE49-F238E27FC236}">
-                <a16:creationId xmlns:a16="http://schemas.microsoft.com/office/drawing/2014/main" id="{976C0594-5B3C-DF60-DEC4-FBAD63D34DD7}"/>
+                <a16:creationId xmlns:a16="http://schemas.microsoft.com/office/drawing/2014/main" id="{FF53EEAD-385F-91FC-DB74-DA29C3FB54E4}"/>
               </a:ext>
             </a:extLst>
           </p:cNvPr>
@@ -4779,7 +4779,7 @@
           <p:cNvPr id="5" name="テキスト ボックス 4">
             <a:extLst>
               <a:ext uri="{FF2B5EF4-FFF2-40B4-BE49-F238E27FC236}">
-                <a16:creationId xmlns:a16="http://schemas.microsoft.com/office/drawing/2014/main" id="{FB6FC1B2-54BC-908D-B2F8-B2E55D15731E}"/>
+                <a16:creationId xmlns:a16="http://schemas.microsoft.com/office/drawing/2014/main" id="{E2185356-0DB4-0BA7-A433-AF5128254CC3}"/>
               </a:ext>
             </a:extLst>
           </p:cNvPr>
@@ -4826,7 +4826,7 @@
             <a:hlinkClick r:id="" action="ppaction://media"/>
             <a:extLst>
               <a:ext uri="{FF2B5EF4-FFF2-40B4-BE49-F238E27FC236}">
-                <a16:creationId xmlns:a16="http://schemas.microsoft.com/office/drawing/2014/main" id="{5B4A0A40-E9E5-175C-10AC-C859D0B434C7}"/>
+                <a16:creationId xmlns:a16="http://schemas.microsoft.com/office/drawing/2014/main" id="{CF815319-77AE-65C9-62C2-A9CB2A00E878}"/>
               </a:ext>
             </a:extLst>
           </p:cNvPr>
@@ -4861,7 +4861,7 @@
     </p:spTree>
     <p:extLst>
       <p:ext uri="{BB962C8B-B14F-4D97-AF65-F5344CB8AC3E}">
-        <p14:creationId xmlns:p14="http://schemas.microsoft.com/office/powerpoint/2010/main" val="3028088431"/>
+        <p14:creationId xmlns:p14="http://schemas.microsoft.com/office/powerpoint/2010/main" val="2436536941"/>
       </p:ext>
     </p:extLst>
   </p:cSld>
@@ -4985,7 +4985,7 @@
           <p:cNvPr id="2" name="テキスト ボックス 1">
             <a:extLst>
               <a:ext uri="{FF2B5EF4-FFF2-40B4-BE49-F238E27FC236}">
-                <a16:creationId xmlns:a16="http://schemas.microsoft.com/office/drawing/2014/main" id="{6D9B55CF-5803-492A-9D39-C58AA6CACED4}"/>
+                <a16:creationId xmlns:a16="http://schemas.microsoft.com/office/drawing/2014/main" id="{89E030EA-BF1E-AE5E-9306-8113314CD0DC}"/>
               </a:ext>
             </a:extLst>
           </p:cNvPr>
@@ -5031,7 +5031,7 @@
           <p:cNvPr id="3" name="テキスト ボックス 2">
             <a:extLst>
               <a:ext uri="{FF2B5EF4-FFF2-40B4-BE49-F238E27FC236}">
-                <a16:creationId xmlns:a16="http://schemas.microsoft.com/office/drawing/2014/main" id="{6CA713CC-BBE2-178B-0243-8073D1B35DD6}"/>
+                <a16:creationId xmlns:a16="http://schemas.microsoft.com/office/drawing/2014/main" id="{54B4A402-F2B0-948D-BF08-3265C53F46D3}"/>
               </a:ext>
             </a:extLst>
           </p:cNvPr>
@@ -5071,7 +5071,7 @@
           <p:cNvPr id="4" name="テキスト ボックス 3">
             <a:extLst>
               <a:ext uri="{FF2B5EF4-FFF2-40B4-BE49-F238E27FC236}">
-                <a16:creationId xmlns:a16="http://schemas.microsoft.com/office/drawing/2014/main" id="{7EC4DF2F-C6CB-BD8F-B4A7-0BFF58CDBD83}"/>
+                <a16:creationId xmlns:a16="http://schemas.microsoft.com/office/drawing/2014/main" id="{5A1BA38E-0971-18D1-1D4A-40628641CC7A}"/>
               </a:ext>
             </a:extLst>
           </p:cNvPr>
@@ -5095,20 +5095,14 @@
           <a:lstStyle/>
           <a:p>
             <a:r>
-              <a:rPr kumimoji="1" lang="en-US" altLang="ja-JP" sz="2000">
+              <a:rPr kumimoji="1" lang="ja-JP" altLang="en-US" sz="2000">
                 <a:solidFill>
                   <a:srgbClr val="333333"/>
                 </a:solidFill>
                 <a:latin typeface="Arial" panose="020B0604020202020204" pitchFamily="34" charset="0"/>
               </a:rPr>
-              <a:t>chore: initialize repository</a:t>
-            </a:r>
-            <a:endParaRPr kumimoji="1" lang="ja-JP" altLang="en-US" sz="2000">
-              <a:solidFill>
-                <a:srgbClr val="333333"/>
-              </a:solidFill>
-              <a:latin typeface="Arial" panose="020B0604020202020204" pitchFamily="34" charset="0"/>
-            </a:endParaRPr>
+              <a:t>直近のコミットでは、プロジェクトの初期構成と開発基盤が整備されました。</a:t>
+            </a:r>
           </a:p>
         </p:txBody>
       </p:sp>
@@ -5117,7 +5111,7 @@
           <p:cNvPr id="5" name="テキスト ボックス 4">
             <a:extLst>
               <a:ext uri="{FF2B5EF4-FFF2-40B4-BE49-F238E27FC236}">
-                <a16:creationId xmlns:a16="http://schemas.microsoft.com/office/drawing/2014/main" id="{960A45FD-6D34-825C-FF1A-601974969C04}"/>
+                <a16:creationId xmlns:a16="http://schemas.microsoft.com/office/drawing/2014/main" id="{CF14DE2E-4BEC-34B3-778A-15F4F78F2C0D}"/>
               </a:ext>
             </a:extLst>
           </p:cNvPr>
@@ -5164,7 +5158,7 @@
             <a:hlinkClick r:id="" action="ppaction://media"/>
             <a:extLst>
               <a:ext uri="{FF2B5EF4-FFF2-40B4-BE49-F238E27FC236}">
-                <a16:creationId xmlns:a16="http://schemas.microsoft.com/office/drawing/2014/main" id="{AE552317-7866-F6C8-AF7E-FA7F8148F8F1}"/>
+                <a16:creationId xmlns:a16="http://schemas.microsoft.com/office/drawing/2014/main" id="{4DDDBCC0-4D03-176F-607E-8AF63BB8475D}"/>
               </a:ext>
             </a:extLst>
           </p:cNvPr>
@@ -5199,7 +5193,7 @@
     </p:spTree>
     <p:extLst>
       <p:ext uri="{BB962C8B-B14F-4D97-AF65-F5344CB8AC3E}">
-        <p14:creationId xmlns:p14="http://schemas.microsoft.com/office/powerpoint/2010/main" val="2993820730"/>
+        <p14:creationId xmlns:p14="http://schemas.microsoft.com/office/powerpoint/2010/main" val="558191439"/>
       </p:ext>
     </p:extLst>
   </p:cSld>
@@ -5242,7 +5236,7 @@
                                   <p:childTnLst>
                                     <p:cmd type="call" cmd="playFrom(0.0)">
                                       <p:cBhvr>
-                                        <p:cTn id="6" dur="6512" fill="hold"/>
+                                        <p:cTn id="6" dur="6126" fill="hold"/>
                                         <p:tgtEl>
                                           <p:spTgt spid="6"/>
                                         </p:tgtEl>
@@ -5323,7 +5317,7 @@
           <p:cNvPr id="2" name="テキスト ボックス 1">
             <a:extLst>
               <a:ext uri="{FF2B5EF4-FFF2-40B4-BE49-F238E27FC236}">
-                <a16:creationId xmlns:a16="http://schemas.microsoft.com/office/drawing/2014/main" id="{7CC4F4E6-C760-05F1-6EAC-4C1668786811}"/>
+                <a16:creationId xmlns:a16="http://schemas.microsoft.com/office/drawing/2014/main" id="{4F5BFF35-7946-C012-BDB1-625D5B8EBC25}"/>
               </a:ext>
             </a:extLst>
           </p:cNvPr>
@@ -5369,7 +5363,7 @@
           <p:cNvPr id="3" name="テキスト ボックス 2">
             <a:extLst>
               <a:ext uri="{FF2B5EF4-FFF2-40B4-BE49-F238E27FC236}">
-                <a16:creationId xmlns:a16="http://schemas.microsoft.com/office/drawing/2014/main" id="{B74F6460-F997-5964-290B-4372805ED631}"/>
+                <a16:creationId xmlns:a16="http://schemas.microsoft.com/office/drawing/2014/main" id="{EF649AB1-8B33-9DF6-4087-EE86AAD99EA8}"/>
               </a:ext>
             </a:extLst>
           </p:cNvPr>
@@ -5409,7 +5403,7 @@
           <p:cNvPr id="4" name="テキスト ボックス 3">
             <a:extLst>
               <a:ext uri="{FF2B5EF4-FFF2-40B4-BE49-F238E27FC236}">
-                <a16:creationId xmlns:a16="http://schemas.microsoft.com/office/drawing/2014/main" id="{A14D2E3C-354B-1591-71FF-4E06ACD73765}"/>
+                <a16:creationId xmlns:a16="http://schemas.microsoft.com/office/drawing/2014/main" id="{819D81E0-B0DA-E530-38B0-88F30BE88E60}"/>
               </a:ext>
             </a:extLst>
           </p:cNvPr>
@@ -5474,7 +5468,7 @@
           <p:cNvPr id="5" name="テキスト ボックス 4">
             <a:extLst>
               <a:ext uri="{FF2B5EF4-FFF2-40B4-BE49-F238E27FC236}">
-                <a16:creationId xmlns:a16="http://schemas.microsoft.com/office/drawing/2014/main" id="{09B71D65-1925-65C0-7ED3-020BA3E6DD68}"/>
+                <a16:creationId xmlns:a16="http://schemas.microsoft.com/office/drawing/2014/main" id="{C17C6B34-1010-2158-0610-8A61CA58961C}"/>
               </a:ext>
             </a:extLst>
           </p:cNvPr>
@@ -5521,7 +5515,7 @@
             <a:hlinkClick r:id="" action="ppaction://media"/>
             <a:extLst>
               <a:ext uri="{FF2B5EF4-FFF2-40B4-BE49-F238E27FC236}">
-                <a16:creationId xmlns:a16="http://schemas.microsoft.com/office/drawing/2014/main" id="{F2AA515E-2000-6CDD-76A1-20984C4FE3D4}"/>
+                <a16:creationId xmlns:a16="http://schemas.microsoft.com/office/drawing/2014/main" id="{2EC7B930-EF17-FD79-6149-BD145FD8FC18}"/>
               </a:ext>
             </a:extLst>
           </p:cNvPr>
@@ -5556,7 +5550,7 @@
     </p:spTree>
     <p:extLst>
       <p:ext uri="{BB962C8B-B14F-4D97-AF65-F5344CB8AC3E}">
-        <p14:creationId xmlns:p14="http://schemas.microsoft.com/office/powerpoint/2010/main" val="1355107997"/>
+        <p14:creationId xmlns:p14="http://schemas.microsoft.com/office/powerpoint/2010/main" val="1654745584"/>
       </p:ext>
     </p:extLst>
   </p:cSld>
